--- a/docs/sales-reform-toolkit/sto/STO体制_説明資料.pptx
+++ b/docs/sales-reform-toolkit/sto/STO体制_説明資料.pptx
@@ -3608,7 +3608,7 @@
               </a:spcAft>
             </a:pPr>
             <a:r>
-              <a:rPr sz="1100" b="1" i="0">
+              <a:rPr sz="1050" b="1" i="0">
                 <a:solidFill>
                   <a:srgbClr val="3A106E"/>
                 </a:solidFill>
@@ -3616,7 +3616,7 @@
                 <a:ea typeface="Yu Gothic"/>
                 <a:cs typeface="Yu Gothic"/>
               </a:rPr>
-              <a:t>坪井さん｜STOリード（専任）</a:t>
+              <a:t>坪井さん｜実行統制・データリード（専任）</a:t>
             </a:r>
           </a:p>
           <a:p>
@@ -3634,7 +3634,7 @@
                 <a:ea typeface="Yu Gothic"/>
                 <a:cs typeface="Yu Gothic"/>
               </a:rPr>
-              <a:t>データ基盤の総責任者</a:t>
+              <a:t>改革の完遂</a:t>
             </a:r>
           </a:p>
           <a:p>
@@ -3652,7 +3652,7 @@
                 <a:ea typeface="Yu Gothic"/>
                 <a:cs typeface="Yu Gothic"/>
               </a:rPr>
-              <a:t>棚卸しマスター・名寄せ・スコアリング・KPI算出</a:t>
+              <a:t>計画・KPI・データ品質・決定ログ・エスカレーション</a:t>
             </a:r>
           </a:p>
         </p:txBody>
@@ -3775,7 +3775,7 @@
               </a:spcAft>
             </a:pPr>
             <a:r>
-              <a:rPr sz="1100" b="1" i="0">
+              <a:rPr sz="1050" b="1" i="0">
                 <a:solidFill>
                   <a:srgbClr val="3A106E"/>
                 </a:solidFill>
@@ -3783,7 +3783,7 @@
                 <a:ea typeface="Yu Gothic"/>
                 <a:cs typeface="Yu Gothic"/>
               </a:rPr>
-              <a:t>岡田さん｜PMO・会議運営（専任）</a:t>
+              <a:t>小澤さん｜変革設計リード（専任）</a:t>
             </a:r>
           </a:p>
           <a:p>
@@ -3801,7 +3801,7 @@
                 <a:ea typeface="Yu Gothic"/>
                 <a:cs typeface="Yu Gothic"/>
               </a:rPr>
-              <a:t>会議体の運転</a:t>
+              <a:t>改革の中身</a:t>
             </a:r>
           </a:p>
           <a:p>
@@ -3819,7 +3819,7 @@
                 <a:ea typeface="Yu Gothic"/>
                 <a:cs typeface="Yu Gothic"/>
               </a:rPr>
-              <a:t>日程・アジェンダ・議事録・宿題管理</a:t>
+              <a:t>課題設計・プロセス再設計・意思決定書・パイロット</a:t>
             </a:r>
           </a:p>
         </p:txBody>
@@ -3832,8 +3832,8 @@
         </p:nvSpPr>
         <p:spPr>
           <a:xfrm>
-            <a:off x="7818120" y="3310128"/>
-            <a:ext cx="3867912" cy="1060704"/>
+            <a:off x="7818120" y="3072384"/>
+            <a:ext cx="3867912" cy="731520"/>
           </a:xfrm>
           <a:prstGeom prst="rect">
             <a:avLst/>
@@ -3878,8 +3878,8 @@
         </p:nvSpPr>
         <p:spPr>
           <a:xfrm>
-            <a:off x="8001000" y="3401568"/>
-            <a:ext cx="3557016" cy="914400"/>
+            <a:off x="8001000" y="3163824"/>
+            <a:ext cx="3557016" cy="585216"/>
           </a:xfrm>
           <a:prstGeom prst="rect">
             <a:avLst/>
@@ -3898,7 +3898,7 @@
               </a:spcAft>
             </a:pPr>
             <a:r>
-              <a:rPr sz="1050" b="1" i="0">
+              <a:rPr sz="1000" b="1" i="0">
                 <a:solidFill>
                   <a:srgbClr val="3A106E"/>
                 </a:solidFill>
@@ -3906,25 +3906,7 @@
                 <a:ea typeface="Yu Gothic"/>
                 <a:cs typeface="Yu Gothic"/>
               </a:rPr>
-              <a:t>柳沼さん｜財務リエゾン（兼務・週2〜3h）</a:t>
-            </a:r>
-          </a:p>
-          <a:p>
-            <a:pPr algn="l">
-              <a:spcAft>
-                <a:spcPts val="200"/>
-              </a:spcAft>
-            </a:pPr>
-            <a:r>
-              <a:rPr sz="950" b="1" i="0">
-                <a:solidFill>
-                  <a:srgbClr val="5F5F6E"/>
-                </a:solidFill>
-                <a:latin typeface="Yu Gothic"/>
-                <a:ea typeface="Yu Gothic"/>
-                <a:cs typeface="Yu Gothic"/>
-              </a:rPr>
-              <a:t>定期供給・ルール検証</a:t>
+              <a:t>大塩さん｜戦略サポート（兼務）</a:t>
             </a:r>
           </a:p>
           <a:p>
@@ -3934,7 +3916,7 @@
               </a:spcAft>
             </a:pPr>
             <a:r>
-              <a:rPr sz="900" b="0" i="0">
+              <a:rPr sz="850" b="0" i="0">
                 <a:solidFill>
                   <a:srgbClr val="262630"/>
                 </a:solidFill>
@@ -3942,7 +3924,7 @@
                 <a:ea typeface="Yu Gothic"/>
                 <a:cs typeface="Yu Gothic"/>
               </a:rPr>
-              <a:t>財務データ定期供給・粗利算定ルール検証</a:t>
+              <a:t>HD経営企画｜論点整理・HD経企との接続</a:t>
             </a:r>
           </a:p>
         </p:txBody>
@@ -3955,7 +3937,7 @@
         </p:nvCxnSpPr>
         <p:spPr>
           <a:xfrm>
-            <a:off x="7406640" y="3840480"/>
+            <a:off x="7406640" y="3438144"/>
             <a:ext cx="411480" cy="0"/>
           </a:xfrm>
           <a:prstGeom prst="bentConnector3">
@@ -3986,7 +3968,149 @@
       </p:cxnSp>
       <p:sp>
         <p:nvSpPr>
-          <p:cNvPr id="20" name="Down Arrow 19"/>
+          <p:cNvPr id="20" name="Rectangle 19"/>
+          <p:cNvSpPr/>
+          <p:nvPr/>
+        </p:nvSpPr>
+        <p:spPr>
+          <a:xfrm>
+            <a:off x="7818120" y="3895344"/>
+            <a:ext cx="3867912" cy="731520"/>
+          </a:xfrm>
+          <a:prstGeom prst="rect">
+            <a:avLst/>
+          </a:prstGeom>
+          <a:solidFill>
+            <a:srgbClr val="F3EFFB"/>
+          </a:solidFill>
+          <a:ln w="9525">
+            <a:solidFill>
+              <a:srgbClr val="5F5F6E"/>
+            </a:solidFill>
+          </a:ln>
+          <a:effectLst/>
+        </p:spPr>
+        <p:style>
+          <a:lnRef idx="1">
+            <a:schemeClr val="accent1"/>
+          </a:lnRef>
+          <a:fillRef idx="3">
+            <a:schemeClr val="accent1"/>
+          </a:fillRef>
+          <a:effectRef idx="2">
+            <a:schemeClr val="accent1"/>
+          </a:effectRef>
+          <a:fontRef idx="minor">
+            <a:schemeClr val="lt1"/>
+          </a:fontRef>
+        </p:style>
+        <p:txBody>
+          <a:bodyPr rtlCol="0" anchor="ctr"/>
+          <a:lstStyle/>
+          <a:p>
+            <a:pPr algn="ctr"/>
+          </a:p>
+        </p:txBody>
+      </p:sp>
+      <p:sp>
+        <p:nvSpPr>
+          <p:cNvPr id="21" name="TextBox 20"/>
+          <p:cNvSpPr txBox="1"/>
+          <p:nvPr/>
+        </p:nvSpPr>
+        <p:spPr>
+          <a:xfrm>
+            <a:off x="8001000" y="3986784"/>
+            <a:ext cx="3557016" cy="585216"/>
+          </a:xfrm>
+          <a:prstGeom prst="rect">
+            <a:avLst/>
+          </a:prstGeom>
+          <a:noFill/>
+        </p:spPr>
+        <p:txBody>
+          <a:bodyPr wrap="square" lIns="0" rIns="0" tIns="0" bIns="0">
+            <a:spAutoFit/>
+          </a:bodyPr>
+          <a:lstStyle/>
+          <a:p>
+            <a:pPr algn="l">
+              <a:spcAft>
+                <a:spcPts val="200"/>
+              </a:spcAft>
+            </a:pPr>
+            <a:r>
+              <a:rPr sz="950" b="1" i="0">
+                <a:solidFill>
+                  <a:srgbClr val="3A106E"/>
+                </a:solidFill>
+                <a:latin typeface="Yu Gothic"/>
+                <a:ea typeface="Yu Gothic"/>
+                <a:cs typeface="Yu Gothic"/>
+              </a:rPr>
+              <a:t>柳沼さん｜財務リエゾン（兼務・週2〜3h）</a:t>
+            </a:r>
+          </a:p>
+          <a:p>
+            <a:pPr algn="l">
+              <a:spcAft>
+                <a:spcPts val="0"/>
+              </a:spcAft>
+            </a:pPr>
+            <a:r>
+              <a:rPr sz="850" b="0" i="0">
+                <a:solidFill>
+                  <a:srgbClr val="262630"/>
+                </a:solidFill>
+                <a:latin typeface="Yu Gothic"/>
+                <a:ea typeface="Yu Gothic"/>
+                <a:cs typeface="Yu Gothic"/>
+              </a:rPr>
+              <a:t>財務データ定期供給・粗利算定検証</a:t>
+            </a:r>
+          </a:p>
+        </p:txBody>
+      </p:sp>
+      <p:cxnSp>
+        <p:nvCxnSpPr>
+          <p:cNvPr id="22" name="Connector 21"/>
+          <p:cNvCxnSpPr/>
+          <p:nvPr/>
+        </p:nvCxnSpPr>
+        <p:spPr>
+          <a:xfrm>
+            <a:off x="7406640" y="4261104"/>
+            <a:ext cx="411480" cy="0"/>
+          </a:xfrm>
+          <a:prstGeom prst="bentConnector3">
+            <a:avLst/>
+          </a:prstGeom>
+          <a:ln w="19050">
+            <a:solidFill>
+              <a:srgbClr val="5F5F6E"/>
+            </a:solidFill>
+            <a:prstDash val="dash"/>
+          </a:ln>
+          <a:effectLst/>
+        </p:spPr>
+        <p:style>
+          <a:lnRef idx="2">
+            <a:schemeClr val="accent1"/>
+          </a:lnRef>
+          <a:fillRef idx="0">
+            <a:schemeClr val="accent1"/>
+          </a:fillRef>
+          <a:effectRef idx="1">
+            <a:schemeClr val="accent1"/>
+          </a:effectRef>
+          <a:fontRef idx="minor">
+            <a:schemeClr val="tx1"/>
+          </a:fontRef>
+        </p:style>
+      </p:cxnSp>
+      <p:sp>
+        <p:nvSpPr>
+          <p:cNvPr id="23" name="Down Arrow 22"/>
           <p:cNvSpPr/>
           <p:nvPr/>
         </p:nvSpPr>
@@ -4030,7 +4154,7 @@
       </p:sp>
       <p:sp>
         <p:nvSpPr>
-          <p:cNvPr id="21" name="TextBox 20"/>
+          <p:cNvPr id="24" name="TextBox 23"/>
           <p:cNvSpPr txBox="1"/>
           <p:nvPr/>
         </p:nvSpPr>
@@ -4071,7 +4195,7 @@
       </p:sp>
       <p:sp>
         <p:nvSpPr>
-          <p:cNvPr id="22" name="Rectangle 21"/>
+          <p:cNvPr id="25" name="Rectangle 24"/>
           <p:cNvSpPr/>
           <p:nvPr/>
         </p:nvSpPr>
@@ -4115,7 +4239,7 @@
       </p:sp>
       <p:sp>
         <p:nvSpPr>
-          <p:cNvPr id="23" name="TextBox 22"/>
+          <p:cNvPr id="26" name="TextBox 25"/>
           <p:cNvSpPr txBox="1"/>
           <p:nvPr/>
         </p:nvSpPr>
@@ -4174,7 +4298,7 @@
       </p:sp>
       <p:sp>
         <p:nvSpPr>
-          <p:cNvPr id="24" name="Rectangle 23"/>
+          <p:cNvPr id="27" name="Rectangle 26"/>
           <p:cNvSpPr/>
           <p:nvPr/>
         </p:nvSpPr>
@@ -4218,7 +4342,7 @@
       </p:sp>
       <p:sp>
         <p:nvSpPr>
-          <p:cNvPr id="25" name="TextBox 24"/>
+          <p:cNvPr id="28" name="TextBox 27"/>
           <p:cNvSpPr txBox="1"/>
           <p:nvPr/>
         </p:nvSpPr>
@@ -4277,7 +4401,7 @@
       </p:sp>
       <p:sp>
         <p:nvSpPr>
-          <p:cNvPr id="26" name="Rectangle 25"/>
+          <p:cNvPr id="29" name="Rectangle 28"/>
           <p:cNvSpPr/>
           <p:nvPr/>
         </p:nvSpPr>
@@ -4321,7 +4445,7 @@
       </p:sp>
       <p:sp>
         <p:nvSpPr>
-          <p:cNvPr id="27" name="TextBox 26"/>
+          <p:cNvPr id="30" name="TextBox 29"/>
           <p:cNvSpPr txBox="1"/>
           <p:nvPr/>
         </p:nvSpPr>
@@ -4380,7 +4504,7 @@
       </p:sp>
       <p:sp>
         <p:nvSpPr>
-          <p:cNvPr id="28" name="Rectangle 27"/>
+          <p:cNvPr id="31" name="Rectangle 30"/>
           <p:cNvSpPr/>
           <p:nvPr/>
         </p:nvSpPr>
@@ -4424,7 +4548,7 @@
       </p:sp>
       <p:sp>
         <p:nvSpPr>
-          <p:cNvPr id="29" name="Rectangle 28"/>
+          <p:cNvPr id="32" name="Rectangle 31"/>
           <p:cNvSpPr/>
           <p:nvPr/>
         </p:nvSpPr>
@@ -4468,7 +4592,7 @@
       </p:sp>
       <p:sp>
         <p:nvSpPr>
-          <p:cNvPr id="30" name="TextBox 29"/>
+          <p:cNvPr id="33" name="TextBox 32"/>
           <p:cNvSpPr txBox="1"/>
           <p:nvPr/>
         </p:nvSpPr>
@@ -4520,7 +4644,7 @@
       </p:sp>
       <p:sp>
         <p:nvSpPr>
-          <p:cNvPr id="31" name="Rectangle 30"/>
+          <p:cNvPr id="34" name="Rectangle 33"/>
           <p:cNvSpPr/>
           <p:nvPr/>
         </p:nvSpPr>
@@ -4564,7 +4688,7 @@
       </p:sp>
       <p:sp>
         <p:nvSpPr>
-          <p:cNvPr id="32" name="TextBox 31"/>
+          <p:cNvPr id="35" name="TextBox 34"/>
           <p:cNvSpPr txBox="1"/>
           <p:nvPr/>
         </p:nvSpPr>
@@ -4605,7 +4729,7 @@
       </p:sp>
       <p:sp>
         <p:nvSpPr>
-          <p:cNvPr id="33" name="TextBox 32"/>
+          <p:cNvPr id="36" name="TextBox 35"/>
           <p:cNvSpPr txBox="1"/>
           <p:nvPr/>
         </p:nvSpPr>
@@ -5316,7 +5440,7 @@
                 <a:ea typeface="Yu Gothic"/>
                 <a:cs typeface="Yu Gothic"/>
               </a:rPr>
-              <a:t>・議事録・宿題起票（岡田）</a:t>
+              <a:t>・議事録・宿題起票（坪井）</a:t>
             </a:r>
           </a:p>
         </p:txBody>
@@ -6027,7 +6151,7 @@
                 <a:ea typeface="Yu Gothic"/>
                 <a:cs typeface="Yu Gothic"/>
               </a:rPr>
-              <a:t>（新谷・坪井・岡田）</a:t>
+              <a:t>（新谷・小澤・坪井）</a:t>
             </a:r>
           </a:p>
           <a:p>

--- a/docs/sales-reform-toolkit/sto/STO体制_説明資料.pptx
+++ b/docs/sales-reform-toolkit/sto/STO体制_説明資料.pptx
@@ -3783,7 +3783,7 @@
                 <a:ea typeface="Yu Gothic"/>
                 <a:cs typeface="Yu Gothic"/>
               </a:rPr>
-              <a:t>小澤さん｜変革設計リード（専任）</a:t>
+              <a:t>小沢さん｜変革設計リード（専任）</a:t>
             </a:r>
           </a:p>
           <a:p>
@@ -6151,7 +6151,7 @@
                 <a:ea typeface="Yu Gothic"/>
                 <a:cs typeface="Yu Gothic"/>
               </a:rPr>
-              <a:t>（新谷・小澤・坪井）</a:t>
+              <a:t>（新谷・小沢・坪井）</a:t>
             </a:r>
           </a:p>
           <a:p>

--- a/docs/sales-reform-toolkit/sto/STO体制_説明資料.pptx
+++ b/docs/sales-reform-toolkit/sto/STO体制_説明資料.pptx
@@ -3166,7 +3166,7 @@
                 <a:ea typeface="Yu Gothic"/>
                 <a:cs typeface="Yu Gothic"/>
               </a:rPr>
-              <a:t>STO体制 — 専任2名＋兼務2名の最小構成</a:t>
+              <a:t>STO体制 — 専任1名＋兼務3名の最小構成</a:t>
             </a:r>
           </a:p>
         </p:txBody>
@@ -3485,7 +3485,7 @@
                 <a:ea typeface="Yu Gothic"/>
                 <a:cs typeface="Yu Gothic"/>
               </a:rPr>
-              <a:t>STO本体（専任2名）</a:t>
+              <a:t>STO本体（2リード）</a:t>
             </a:r>
           </a:p>
         </p:txBody>
@@ -3616,7 +3616,7 @@
                 <a:ea typeface="Yu Gothic"/>
                 <a:cs typeface="Yu Gothic"/>
               </a:rPr>
-              <a:t>坪井さん｜実行統制・データリード（専任）</a:t>
+              <a:t>坪井さん｜実行統制・データリード（兼務）</a:t>
             </a:r>
           </a:p>
           <a:p>

--- a/docs/sales-reform-toolkit/sto/STO体制_説明資料.pptx
+++ b/docs/sales-reform-toolkit/sto/STO体制_説明資料.pptx
@@ -3091,14 +3091,160 @@
       <p:grpSpPr/>
       <p:sp>
         <p:nvSpPr>
-          <p:cNvPr id="2" name="TextBox 1"/>
+          <p:cNvPr id="2" name="Rounded Rectangle 1"/>
+          <p:cNvSpPr/>
+          <p:nvPr/>
+        </p:nvSpPr>
+        <p:spPr>
+          <a:xfrm>
+            <a:off x="502920" y="274320"/>
+            <a:ext cx="2635758" cy="274320"/>
+          </a:xfrm>
+          <a:prstGeom prst="roundRect">
+            <a:avLst>
+              <a:gd name="adj" fmla="val 50000"/>
+            </a:avLst>
+          </a:prstGeom>
+          <a:solidFill>
+            <a:srgbClr val="EAF1FE"/>
+          </a:solidFill>
+          <a:ln>
+            <a:noFill/>
+          </a:ln>
+          <a:effectLst/>
+        </p:spPr>
+        <p:style>
+          <a:lnRef idx="1">
+            <a:schemeClr val="accent1"/>
+          </a:lnRef>
+          <a:fillRef idx="3">
+            <a:schemeClr val="accent1"/>
+          </a:fillRef>
+          <a:effectRef idx="2">
+            <a:schemeClr val="accent1"/>
+          </a:effectRef>
+          <a:fontRef idx="minor">
+            <a:schemeClr val="lt1"/>
+          </a:fontRef>
+        </p:style>
+        <p:txBody>
+          <a:bodyPr rtlCol="0" anchor="ctr" wrap="none" lIns="109728" rIns="109728" tIns="0" bIns="0"/>
+          <a:lstStyle/>
+          <a:p>
+            <a:pPr algn="l">
+              <a:spcAft>
+                <a:spcPts val="0"/>
+              </a:spcAft>
+            </a:pPr>
+            <a:r>
+              <a:rPr sz="900" b="1" i="0">
+                <a:solidFill>
+                  <a:srgbClr val="2563EB"/>
+                </a:solidFill>
+                <a:latin typeface="Yu Gothic"/>
+                <a:ea typeface="Yu Gothic"/>
+                <a:cs typeface="Yu Gothic"/>
+              </a:rPr>
+              <a:t>STO — SALES TRANSFORMATION OFFICE</a:t>
+            </a:r>
+          </a:p>
+        </p:txBody>
+      </p:sp>
+      <p:sp>
+        <p:nvSpPr>
+          <p:cNvPr id="3" name="TextBox 2"/>
           <p:cNvSpPr txBox="1"/>
           <p:nvPr/>
         </p:nvSpPr>
         <p:spPr>
           <a:xfrm>
-            <a:off x="502920" y="256032"/>
-            <a:ext cx="11155680" cy="256032"/>
+            <a:off x="502920" y="566928"/>
+            <a:ext cx="11155680" cy="804672"/>
+          </a:xfrm>
+          <a:prstGeom prst="rect">
+            <a:avLst/>
+          </a:prstGeom>
+          <a:noFill/>
+        </p:spPr>
+        <p:txBody>
+          <a:bodyPr wrap="square" lIns="0" rIns="0" tIns="0" bIns="0">
+            <a:spAutoFit/>
+          </a:bodyPr>
+          <a:lstStyle/>
+          <a:p>
+            <a:pPr algn="l">
+              <a:spcAft>
+                <a:spcPts val="0"/>
+              </a:spcAft>
+            </a:pPr>
+            <a:r>
+              <a:rPr sz="1800" b="1" i="0">
+                <a:solidFill>
+                  <a:srgbClr val="1B1B26"/>
+                </a:solidFill>
+                <a:latin typeface="Yu Gothic"/>
+                <a:ea typeface="Yu Gothic"/>
+                <a:cs typeface="Yu Gothic"/>
+              </a:rPr>
+              <a:t>STO体制 — 専任1名＋兼務3名の最小構成</a:t>
+            </a:r>
+          </a:p>
+        </p:txBody>
+      </p:sp>
+      <p:sp>
+        <p:nvSpPr>
+          <p:cNvPr id="4" name="Rectangle 3"/>
+          <p:cNvSpPr/>
+          <p:nvPr/>
+        </p:nvSpPr>
+        <p:spPr>
+          <a:xfrm>
+            <a:off x="502920" y="1335024"/>
+            <a:ext cx="11183112" cy="11430"/>
+          </a:xfrm>
+          <a:prstGeom prst="rect">
+            <a:avLst/>
+          </a:prstGeom>
+          <a:solidFill>
+            <a:srgbClr val="E5E7EB"/>
+          </a:solidFill>
+          <a:ln>
+            <a:noFill/>
+          </a:ln>
+          <a:effectLst/>
+        </p:spPr>
+        <p:style>
+          <a:lnRef idx="1">
+            <a:schemeClr val="accent1"/>
+          </a:lnRef>
+          <a:fillRef idx="3">
+            <a:schemeClr val="accent1"/>
+          </a:fillRef>
+          <a:effectRef idx="2">
+            <a:schemeClr val="accent1"/>
+          </a:effectRef>
+          <a:fontRef idx="minor">
+            <a:schemeClr val="lt1"/>
+          </a:fontRef>
+        </p:style>
+        <p:txBody>
+          <a:bodyPr rtlCol="0" anchor="ctr"/>
+          <a:lstStyle/>
+          <a:p>
+            <a:pPr algn="ctr"/>
+          </a:p>
+        </p:txBody>
+      </p:sp>
+      <p:sp>
+        <p:nvSpPr>
+          <p:cNvPr id="5" name="TextBox 4"/>
+          <p:cNvSpPr txBox="1"/>
+          <p:nvPr/>
+        </p:nvSpPr>
+        <p:spPr>
+          <a:xfrm>
+            <a:off x="502920" y="1481328"/>
+            <a:ext cx="11155680" cy="310896"/>
           </a:xfrm>
           <a:prstGeom prst="rect">
             <a:avLst/>
@@ -3117,29 +3263,222 @@
               </a:spcAft>
             </a:pPr>
             <a:r>
-              <a:rPr sz="1000" b="1" i="0">
-                <a:solidFill>
-                  <a:srgbClr val="7823DC"/>
-                </a:solidFill>
-                <a:latin typeface="Yu Gothic"/>
-                <a:ea typeface="Yu Gothic"/>
-                <a:cs typeface="Yu Gothic"/>
-              </a:rPr>
-              <a:t>STO — SALES TRANSFORMATION OFFICE</a:t>
-            </a:r>
-          </a:p>
-        </p:txBody>
-      </p:sp>
-      <p:sp>
-        <p:nvSpPr>
-          <p:cNvPr id="3" name="TextBox 2"/>
+              <a:rPr sz="1150" b="1" i="0">
+                <a:solidFill>
+                  <a:srgbClr val="2563EB"/>
+                </a:solidFill>
+                <a:latin typeface="Yu Gothic"/>
+                <a:ea typeface="Yu Gothic"/>
+                <a:cs typeface="Yu Gothic"/>
+              </a:rPr>
+              <a:t>機能が先、人数は後。改革を実行するのは各部長。STOは「データを回す・会議を回す・意思決定に上げる」の運転席</a:t>
+            </a:r>
+          </a:p>
+        </p:txBody>
+      </p:sp>
+      <p:sp>
+        <p:nvSpPr>
+          <p:cNvPr id="6" name="Rectangle 5"/>
+          <p:cNvSpPr/>
+          <p:nvPr/>
+        </p:nvSpPr>
+        <p:spPr>
+          <a:xfrm>
+            <a:off x="3535527" y="1975104"/>
+            <a:ext cx="5120640" cy="749808"/>
+          </a:xfrm>
+          <a:prstGeom prst="rect">
+            <a:avLst/>
+          </a:prstGeom>
+          <a:solidFill>
+            <a:srgbClr val="1E40AF"/>
+          </a:solidFill>
+          <a:ln>
+            <a:noFill/>
+          </a:ln>
+          <a:effectLst/>
+        </p:spPr>
+        <p:style>
+          <a:lnRef idx="1">
+            <a:schemeClr val="accent1"/>
+          </a:lnRef>
+          <a:fillRef idx="3">
+            <a:schemeClr val="accent1"/>
+          </a:fillRef>
+          <a:effectRef idx="2">
+            <a:schemeClr val="accent1"/>
+          </a:effectRef>
+          <a:fontRef idx="minor">
+            <a:schemeClr val="lt1"/>
+          </a:fontRef>
+        </p:style>
+        <p:txBody>
+          <a:bodyPr rtlCol="0" anchor="ctr"/>
+          <a:lstStyle/>
+          <a:p>
+            <a:pPr algn="ctr"/>
+          </a:p>
+        </p:txBody>
+      </p:sp>
+      <p:sp>
+        <p:nvSpPr>
+          <p:cNvPr id="7" name="TextBox 6"/>
           <p:cNvSpPr txBox="1"/>
           <p:nvPr/>
         </p:nvSpPr>
         <p:spPr>
           <a:xfrm>
-            <a:off x="502920" y="512064"/>
-            <a:ext cx="11155680" cy="868680"/>
+            <a:off x="3718407" y="2075688"/>
+            <a:ext cx="4754880" cy="585216"/>
+          </a:xfrm>
+          <a:prstGeom prst="rect">
+            <a:avLst/>
+          </a:prstGeom>
+          <a:noFill/>
+        </p:spPr>
+        <p:txBody>
+          <a:bodyPr wrap="square" lIns="0" rIns="0" tIns="0" bIns="0" anchor="ctr">
+            <a:spAutoFit/>
+          </a:bodyPr>
+          <a:lstStyle/>
+          <a:p>
+            <a:pPr algn="ctr">
+              <a:spcAft>
+                <a:spcPts val="100"/>
+              </a:spcAft>
+            </a:pPr>
+            <a:r>
+              <a:rPr sz="1250" b="1" i="0">
+                <a:solidFill>
+                  <a:srgbClr val="FFFFFF"/>
+                </a:solidFill>
+                <a:latin typeface="Yu Gothic"/>
+                <a:ea typeface="Yu Gothic"/>
+                <a:cs typeface="Yu Gothic"/>
+              </a:rPr>
+              <a:t>オーナー：新谷（専務執行役員・兼務）</a:t>
+            </a:r>
+          </a:p>
+          <a:p>
+            <a:pPr algn="ctr">
+              <a:spcAft>
+                <a:spcPts val="0"/>
+              </a:spcAft>
+            </a:pPr>
+            <a:r>
+              <a:rPr sz="1000" b="0" i="0">
+                <a:solidFill>
+                  <a:srgbClr val="BFD4FE"/>
+                </a:solidFill>
+                <a:latin typeface="Yu Gothic"/>
+                <a:ea typeface="Yu Gothic"/>
+                <a:cs typeface="Yu Gothic"/>
+              </a:rPr>
+              <a:t>意思決定・トップ外交・詰まりの解消</a:t>
+            </a:r>
+          </a:p>
+        </p:txBody>
+      </p:sp>
+      <p:sp>
+        <p:nvSpPr>
+          <p:cNvPr id="8" name="Down Arrow 7"/>
+          <p:cNvSpPr/>
+          <p:nvPr/>
+        </p:nvSpPr>
+        <p:spPr>
+          <a:xfrm>
+            <a:off x="5943600" y="2761488"/>
+            <a:ext cx="301752" cy="237744"/>
+          </a:xfrm>
+          <a:prstGeom prst="downArrow">
+            <a:avLst/>
+          </a:prstGeom>
+          <a:solidFill>
+            <a:srgbClr val="2563EB"/>
+          </a:solidFill>
+          <a:ln>
+            <a:noFill/>
+          </a:ln>
+          <a:effectLst/>
+        </p:spPr>
+        <p:style>
+          <a:lnRef idx="1">
+            <a:schemeClr val="accent1"/>
+          </a:lnRef>
+          <a:fillRef idx="3">
+            <a:schemeClr val="accent1"/>
+          </a:fillRef>
+          <a:effectRef idx="2">
+            <a:schemeClr val="accent1"/>
+          </a:effectRef>
+          <a:fontRef idx="minor">
+            <a:schemeClr val="lt1"/>
+          </a:fontRef>
+        </p:style>
+        <p:txBody>
+          <a:bodyPr rtlCol="0" anchor="ctr"/>
+          <a:lstStyle/>
+          <a:p>
+            <a:pPr algn="ctr"/>
+          </a:p>
+        </p:txBody>
+      </p:sp>
+      <p:sp>
+        <p:nvSpPr>
+          <p:cNvPr id="9" name="Rectangle 8"/>
+          <p:cNvSpPr/>
+          <p:nvPr/>
+        </p:nvSpPr>
+        <p:spPr>
+          <a:xfrm>
+            <a:off x="502920" y="3054096"/>
+            <a:ext cx="6903720" cy="1572768"/>
+          </a:xfrm>
+          <a:prstGeom prst="rect">
+            <a:avLst/>
+          </a:prstGeom>
+          <a:solidFill>
+            <a:srgbClr val="F6F8FB"/>
+          </a:solidFill>
+          <a:ln w="9525">
+            <a:solidFill>
+              <a:srgbClr val="2563EB"/>
+            </a:solidFill>
+          </a:ln>
+          <a:effectLst/>
+        </p:spPr>
+        <p:style>
+          <a:lnRef idx="1">
+            <a:schemeClr val="accent1"/>
+          </a:lnRef>
+          <a:fillRef idx="3">
+            <a:schemeClr val="accent1"/>
+          </a:fillRef>
+          <a:effectRef idx="2">
+            <a:schemeClr val="accent1"/>
+          </a:effectRef>
+          <a:fontRef idx="minor">
+            <a:schemeClr val="lt1"/>
+          </a:fontRef>
+        </p:style>
+        <p:txBody>
+          <a:bodyPr rtlCol="0" anchor="ctr"/>
+          <a:lstStyle/>
+          <a:p>
+            <a:pPr algn="ctr"/>
+          </a:p>
+        </p:txBody>
+      </p:sp>
+      <p:sp>
+        <p:nvSpPr>
+          <p:cNvPr id="10" name="TextBox 9"/>
+          <p:cNvSpPr txBox="1"/>
+          <p:nvPr/>
+        </p:nvSpPr>
+        <p:spPr>
+          <a:xfrm>
+            <a:off x="630936" y="3127248"/>
+            <a:ext cx="6647688" cy="256032"/>
           </a:xfrm>
           <a:prstGeom prst="rect">
             <a:avLst/>
@@ -3151,6 +3490,173 @@
             <a:spAutoFit/>
           </a:bodyPr>
           <a:lstStyle/>
+          <a:p>
+            <a:pPr algn="l">
+              <a:spcAft>
+                <a:spcPts val="400"/>
+              </a:spcAft>
+            </a:pPr>
+            <a:r>
+              <a:rPr sz="1050" b="1" i="0">
+                <a:solidFill>
+                  <a:srgbClr val="2563EB"/>
+                </a:solidFill>
+                <a:latin typeface="Yu Gothic"/>
+                <a:ea typeface="Yu Gothic"/>
+                <a:cs typeface="Yu Gothic"/>
+              </a:rPr>
+              <a:t>STO本体（2リード）</a:t>
+            </a:r>
+          </a:p>
+        </p:txBody>
+      </p:sp>
+      <p:sp>
+        <p:nvSpPr>
+          <p:cNvPr id="11" name="Rectangle 10"/>
+          <p:cNvSpPr/>
+          <p:nvPr/>
+        </p:nvSpPr>
+        <p:spPr>
+          <a:xfrm>
+            <a:off x="667512" y="3438144"/>
+            <a:ext cx="3200400" cy="1060704"/>
+          </a:xfrm>
+          <a:prstGeom prst="rect">
+            <a:avLst/>
+          </a:prstGeom>
+          <a:solidFill>
+            <a:srgbClr val="FFFFFF"/>
+          </a:solidFill>
+          <a:ln w="9525">
+            <a:solidFill>
+              <a:srgbClr val="E5E7EB"/>
+            </a:solidFill>
+          </a:ln>
+          <a:effectLst/>
+        </p:spPr>
+        <p:style>
+          <a:lnRef idx="1">
+            <a:schemeClr val="accent1"/>
+          </a:lnRef>
+          <a:fillRef idx="3">
+            <a:schemeClr val="accent1"/>
+          </a:fillRef>
+          <a:effectRef idx="2">
+            <a:schemeClr val="accent1"/>
+          </a:effectRef>
+          <a:fontRef idx="minor">
+            <a:schemeClr val="lt1"/>
+          </a:fontRef>
+        </p:style>
+        <p:txBody>
+          <a:bodyPr rtlCol="0" anchor="ctr"/>
+          <a:lstStyle/>
+          <a:p>
+            <a:pPr algn="ctr"/>
+          </a:p>
+        </p:txBody>
+      </p:sp>
+      <p:sp>
+        <p:nvSpPr>
+          <p:cNvPr id="12" name="Rectangle 11"/>
+          <p:cNvSpPr/>
+          <p:nvPr/>
+        </p:nvSpPr>
+        <p:spPr>
+          <a:xfrm>
+            <a:off x="667512" y="3438144"/>
+            <a:ext cx="64008" cy="1060704"/>
+          </a:xfrm>
+          <a:prstGeom prst="rect">
+            <a:avLst/>
+          </a:prstGeom>
+          <a:solidFill>
+            <a:srgbClr val="2563EB"/>
+          </a:solidFill>
+          <a:ln>
+            <a:noFill/>
+          </a:ln>
+          <a:effectLst/>
+        </p:spPr>
+        <p:style>
+          <a:lnRef idx="1">
+            <a:schemeClr val="accent1"/>
+          </a:lnRef>
+          <a:fillRef idx="3">
+            <a:schemeClr val="accent1"/>
+          </a:fillRef>
+          <a:effectRef idx="2">
+            <a:schemeClr val="accent1"/>
+          </a:effectRef>
+          <a:fontRef idx="minor">
+            <a:schemeClr val="lt1"/>
+          </a:fontRef>
+        </p:style>
+        <p:txBody>
+          <a:bodyPr rtlCol="0" anchor="ctr"/>
+          <a:lstStyle/>
+          <a:p>
+            <a:pPr algn="ctr"/>
+          </a:p>
+        </p:txBody>
+      </p:sp>
+      <p:sp>
+        <p:nvSpPr>
+          <p:cNvPr id="13" name="TextBox 12"/>
+          <p:cNvSpPr txBox="1"/>
+          <p:nvPr/>
+        </p:nvSpPr>
+        <p:spPr>
+          <a:xfrm>
+            <a:off x="850392" y="3529584"/>
+            <a:ext cx="2889504" cy="914400"/>
+          </a:xfrm>
+          <a:prstGeom prst="rect">
+            <a:avLst/>
+          </a:prstGeom>
+          <a:noFill/>
+        </p:spPr>
+        <p:txBody>
+          <a:bodyPr wrap="square" lIns="0" rIns="0" tIns="0" bIns="0">
+            <a:spAutoFit/>
+          </a:bodyPr>
+          <a:lstStyle/>
+          <a:p>
+            <a:pPr algn="l">
+              <a:spcAft>
+                <a:spcPts val="200"/>
+              </a:spcAft>
+            </a:pPr>
+            <a:r>
+              <a:rPr sz="1050" b="1" i="0">
+                <a:solidFill>
+                  <a:srgbClr val="1E40AF"/>
+                </a:solidFill>
+                <a:latin typeface="Yu Gothic"/>
+                <a:ea typeface="Yu Gothic"/>
+                <a:cs typeface="Yu Gothic"/>
+              </a:rPr>
+              <a:t>坪井さん｜実行統制・データリード（兼務）</a:t>
+            </a:r>
+          </a:p>
+          <a:p>
+            <a:pPr algn="l">
+              <a:spcAft>
+                <a:spcPts val="200"/>
+              </a:spcAft>
+            </a:pPr>
+            <a:r>
+              <a:rPr sz="950" b="1" i="0">
+                <a:solidFill>
+                  <a:srgbClr val="2563EB"/>
+                </a:solidFill>
+                <a:latin typeface="Yu Gothic"/>
+                <a:ea typeface="Yu Gothic"/>
+                <a:cs typeface="Yu Gothic"/>
+              </a:rPr>
+              <a:t>改革の完遂</a:t>
+            </a:r>
+          </a:p>
           <a:p>
             <a:pPr algn="l">
               <a:spcAft>
@@ -3158,35 +3664,81 @@
               </a:spcAft>
             </a:pPr>
             <a:r>
-              <a:rPr sz="1900" b="1" i="0">
-                <a:solidFill>
-                  <a:srgbClr val="262630"/>
-                </a:solidFill>
-                <a:latin typeface="Yu Gothic"/>
-                <a:ea typeface="Yu Gothic"/>
-                <a:cs typeface="Yu Gothic"/>
-              </a:rPr>
-              <a:t>STO体制 — 専任1名＋兼務3名の最小構成</a:t>
-            </a:r>
-          </a:p>
-        </p:txBody>
-      </p:sp>
-      <p:sp>
-        <p:nvSpPr>
-          <p:cNvPr id="4" name="Rectangle 3"/>
+              <a:rPr sz="900" b="0" i="0">
+                <a:solidFill>
+                  <a:srgbClr val="1B1B26"/>
+                </a:solidFill>
+                <a:latin typeface="Yu Gothic"/>
+                <a:ea typeface="Yu Gothic"/>
+                <a:cs typeface="Yu Gothic"/>
+              </a:rPr>
+              <a:t>計画・KPI・データ品質・決定ログ・エスカレーション</a:t>
+            </a:r>
+          </a:p>
+        </p:txBody>
+      </p:sp>
+      <p:sp>
+        <p:nvSpPr>
+          <p:cNvPr id="14" name="Rectangle 13"/>
           <p:cNvSpPr/>
           <p:nvPr/>
         </p:nvSpPr>
         <p:spPr>
           <a:xfrm>
-            <a:off x="502920" y="1389888"/>
-            <a:ext cx="1463040" cy="33020"/>
+            <a:off x="4050792" y="3438144"/>
+            <a:ext cx="3200400" cy="1060704"/>
           </a:xfrm>
           <a:prstGeom prst="rect">
             <a:avLst/>
           </a:prstGeom>
           <a:solidFill>
-            <a:srgbClr val="7823DC"/>
+            <a:srgbClr val="FFFFFF"/>
+          </a:solidFill>
+          <a:ln w="9525">
+            <a:solidFill>
+              <a:srgbClr val="E5E7EB"/>
+            </a:solidFill>
+          </a:ln>
+          <a:effectLst/>
+        </p:spPr>
+        <p:style>
+          <a:lnRef idx="1">
+            <a:schemeClr val="accent1"/>
+          </a:lnRef>
+          <a:fillRef idx="3">
+            <a:schemeClr val="accent1"/>
+          </a:fillRef>
+          <a:effectRef idx="2">
+            <a:schemeClr val="accent1"/>
+          </a:effectRef>
+          <a:fontRef idx="minor">
+            <a:schemeClr val="lt1"/>
+          </a:fontRef>
+        </p:style>
+        <p:txBody>
+          <a:bodyPr rtlCol="0" anchor="ctr"/>
+          <a:lstStyle/>
+          <a:p>
+            <a:pPr algn="ctr"/>
+          </a:p>
+        </p:txBody>
+      </p:sp>
+      <p:sp>
+        <p:nvSpPr>
+          <p:cNvPr id="15" name="Rectangle 14"/>
+          <p:cNvSpPr/>
+          <p:nvPr/>
+        </p:nvSpPr>
+        <p:spPr>
+          <a:xfrm>
+            <a:off x="4050792" y="3438144"/>
+            <a:ext cx="64008" cy="1060704"/>
+          </a:xfrm>
+          <a:prstGeom prst="rect">
+            <a:avLst/>
+          </a:prstGeom>
+          <a:solidFill>
+            <a:srgbClr val="2563EB"/>
           </a:solidFill>
           <a:ln>
             <a:noFill/>
@@ -3217,14 +3769,14 @@
       </p:sp>
       <p:sp>
         <p:nvSpPr>
-          <p:cNvPr id="5" name="TextBox 4"/>
+          <p:cNvPr id="16" name="TextBox 15"/>
           <p:cNvSpPr txBox="1"/>
           <p:nvPr/>
         </p:nvSpPr>
         <p:spPr>
           <a:xfrm>
-            <a:off x="502920" y="1517904"/>
-            <a:ext cx="11155680" cy="310896"/>
+            <a:off x="4233672" y="3529584"/>
+            <a:ext cx="2889504" cy="914400"/>
           </a:xfrm>
           <a:prstGeom prst="rect">
             <a:avLst/>
@@ -3239,42 +3791,80 @@
           <a:p>
             <a:pPr algn="l">
               <a:spcAft>
-                <a:spcPts val="400"/>
+                <a:spcPts val="200"/>
               </a:spcAft>
             </a:pPr>
             <a:r>
-              <a:rPr sz="1150" b="1" i="0">
-                <a:solidFill>
-                  <a:srgbClr val="3A106E"/>
-                </a:solidFill>
-                <a:latin typeface="Yu Gothic"/>
-                <a:ea typeface="Yu Gothic"/>
-                <a:cs typeface="Yu Gothic"/>
-              </a:rPr>
-              <a:t>機能が先、人数は後。改革を実行するのは各部長。STOは「データを回す・会議を回す・意思決定に上げる」の運転席</a:t>
-            </a:r>
-          </a:p>
-        </p:txBody>
-      </p:sp>
-      <p:sp>
-        <p:nvSpPr>
-          <p:cNvPr id="6" name="Rectangle 5"/>
+              <a:rPr sz="1050" b="1" i="0">
+                <a:solidFill>
+                  <a:srgbClr val="1E40AF"/>
+                </a:solidFill>
+                <a:latin typeface="Yu Gothic"/>
+                <a:ea typeface="Yu Gothic"/>
+                <a:cs typeface="Yu Gothic"/>
+              </a:rPr>
+              <a:t>小沢さん｜変革設計リード（専任）</a:t>
+            </a:r>
+          </a:p>
+          <a:p>
+            <a:pPr algn="l">
+              <a:spcAft>
+                <a:spcPts val="200"/>
+              </a:spcAft>
+            </a:pPr>
+            <a:r>
+              <a:rPr sz="950" b="1" i="0">
+                <a:solidFill>
+                  <a:srgbClr val="2563EB"/>
+                </a:solidFill>
+                <a:latin typeface="Yu Gothic"/>
+                <a:ea typeface="Yu Gothic"/>
+                <a:cs typeface="Yu Gothic"/>
+              </a:rPr>
+              <a:t>改革の中身</a:t>
+            </a:r>
+          </a:p>
+          <a:p>
+            <a:pPr algn="l">
+              <a:spcAft>
+                <a:spcPts val="0"/>
+              </a:spcAft>
+            </a:pPr>
+            <a:r>
+              <a:rPr sz="900" b="0" i="0">
+                <a:solidFill>
+                  <a:srgbClr val="1B1B26"/>
+                </a:solidFill>
+                <a:latin typeface="Yu Gothic"/>
+                <a:ea typeface="Yu Gothic"/>
+                <a:cs typeface="Yu Gothic"/>
+              </a:rPr>
+              <a:t>課題設計・プロセス再設計・意思決定書・パイロット</a:t>
+            </a:r>
+          </a:p>
+        </p:txBody>
+      </p:sp>
+      <p:sp>
+        <p:nvSpPr>
+          <p:cNvPr id="17" name="Rectangle 16"/>
           <p:cNvSpPr/>
           <p:nvPr/>
         </p:nvSpPr>
         <p:spPr>
           <a:xfrm>
-            <a:off x="3535527" y="1975104"/>
-            <a:ext cx="5120640" cy="749808"/>
+            <a:off x="7818120" y="3072384"/>
+            <a:ext cx="3867912" cy="731520"/>
           </a:xfrm>
           <a:prstGeom prst="rect">
             <a:avLst/>
           </a:prstGeom>
           <a:solidFill>
-            <a:srgbClr val="3A106E"/>
+            <a:srgbClr val="EAF1FE"/>
           </a:solidFill>
-          <a:ln>
-            <a:noFill/>
+          <a:ln w="9525">
+            <a:solidFill>
+              <a:srgbClr val="6B7280"/>
+            </a:solidFill>
           </a:ln>
           <a:effectLst/>
         </p:spPr>
@@ -3302,294 +3892,14 @@
       </p:sp>
       <p:sp>
         <p:nvSpPr>
-          <p:cNvPr id="7" name="TextBox 6"/>
+          <p:cNvPr id="18" name="TextBox 17"/>
           <p:cNvSpPr txBox="1"/>
           <p:nvPr/>
         </p:nvSpPr>
         <p:spPr>
           <a:xfrm>
-            <a:off x="3718407" y="2075688"/>
-            <a:ext cx="4754880" cy="585216"/>
-          </a:xfrm>
-          <a:prstGeom prst="rect">
-            <a:avLst/>
-          </a:prstGeom>
-          <a:noFill/>
-        </p:spPr>
-        <p:txBody>
-          <a:bodyPr wrap="square" lIns="0" rIns="0" tIns="0" bIns="0" anchor="ctr">
-            <a:spAutoFit/>
-          </a:bodyPr>
-          <a:lstStyle/>
-          <a:p>
-            <a:pPr algn="ctr">
-              <a:spcAft>
-                <a:spcPts val="100"/>
-              </a:spcAft>
-            </a:pPr>
-            <a:r>
-              <a:rPr sz="1250" b="1" i="0">
-                <a:solidFill>
-                  <a:srgbClr val="FFFFFF"/>
-                </a:solidFill>
-                <a:latin typeface="Yu Gothic"/>
-                <a:ea typeface="Yu Gothic"/>
-                <a:cs typeface="Yu Gothic"/>
-              </a:rPr>
-              <a:t>オーナー：新谷（専務執行役員・兼務）</a:t>
-            </a:r>
-          </a:p>
-          <a:p>
-            <a:pPr algn="ctr">
-              <a:spcAft>
-                <a:spcPts val="0"/>
-              </a:spcAft>
-            </a:pPr>
-            <a:r>
-              <a:rPr sz="1000" b="0" i="0">
-                <a:solidFill>
-                  <a:srgbClr val="E6DAF7"/>
-                </a:solidFill>
-                <a:latin typeface="Yu Gothic"/>
-                <a:ea typeface="Yu Gothic"/>
-                <a:cs typeface="Yu Gothic"/>
-              </a:rPr>
-              <a:t>意思決定・トップ外交・詰まりの解消</a:t>
-            </a:r>
-          </a:p>
-        </p:txBody>
-      </p:sp>
-      <p:sp>
-        <p:nvSpPr>
-          <p:cNvPr id="8" name="Down Arrow 7"/>
-          <p:cNvSpPr/>
-          <p:nvPr/>
-        </p:nvSpPr>
-        <p:spPr>
-          <a:xfrm>
-            <a:off x="5943600" y="2761488"/>
-            <a:ext cx="301752" cy="237744"/>
-          </a:xfrm>
-          <a:prstGeom prst="downArrow">
-            <a:avLst/>
-          </a:prstGeom>
-          <a:solidFill>
-            <a:srgbClr val="7823DC"/>
-          </a:solidFill>
-          <a:ln>
-            <a:noFill/>
-          </a:ln>
-          <a:effectLst/>
-        </p:spPr>
-        <p:style>
-          <a:lnRef idx="1">
-            <a:schemeClr val="accent1"/>
-          </a:lnRef>
-          <a:fillRef idx="3">
-            <a:schemeClr val="accent1"/>
-          </a:fillRef>
-          <a:effectRef idx="2">
-            <a:schemeClr val="accent1"/>
-          </a:effectRef>
-          <a:fontRef idx="minor">
-            <a:schemeClr val="lt1"/>
-          </a:fontRef>
-        </p:style>
-        <p:txBody>
-          <a:bodyPr rtlCol="0" anchor="ctr"/>
-          <a:lstStyle/>
-          <a:p>
-            <a:pPr algn="ctr"/>
-          </a:p>
-        </p:txBody>
-      </p:sp>
-      <p:sp>
-        <p:nvSpPr>
-          <p:cNvPr id="9" name="Rectangle 8"/>
-          <p:cNvSpPr/>
-          <p:nvPr/>
-        </p:nvSpPr>
-        <p:spPr>
-          <a:xfrm>
-            <a:off x="502920" y="3054096"/>
-            <a:ext cx="6903720" cy="1572768"/>
-          </a:xfrm>
-          <a:prstGeom prst="rect">
-            <a:avLst/>
-          </a:prstGeom>
-          <a:solidFill>
-            <a:srgbClr val="F7F7F9"/>
-          </a:solidFill>
-          <a:ln w="9525">
-            <a:solidFill>
-              <a:srgbClr val="7823DC"/>
-            </a:solidFill>
-          </a:ln>
-          <a:effectLst/>
-        </p:spPr>
-        <p:style>
-          <a:lnRef idx="1">
-            <a:schemeClr val="accent1"/>
-          </a:lnRef>
-          <a:fillRef idx="3">
-            <a:schemeClr val="accent1"/>
-          </a:fillRef>
-          <a:effectRef idx="2">
-            <a:schemeClr val="accent1"/>
-          </a:effectRef>
-          <a:fontRef idx="minor">
-            <a:schemeClr val="lt1"/>
-          </a:fontRef>
-        </p:style>
-        <p:txBody>
-          <a:bodyPr rtlCol="0" anchor="ctr"/>
-          <a:lstStyle/>
-          <a:p>
-            <a:pPr algn="ctr"/>
-          </a:p>
-        </p:txBody>
-      </p:sp>
-      <p:sp>
-        <p:nvSpPr>
-          <p:cNvPr id="10" name="TextBox 9"/>
-          <p:cNvSpPr txBox="1"/>
-          <p:nvPr/>
-        </p:nvSpPr>
-        <p:spPr>
-          <a:xfrm>
-            <a:off x="630936" y="3127248"/>
-            <a:ext cx="6647688" cy="256032"/>
-          </a:xfrm>
-          <a:prstGeom prst="rect">
-            <a:avLst/>
-          </a:prstGeom>
-          <a:noFill/>
-        </p:spPr>
-        <p:txBody>
-          <a:bodyPr wrap="square" lIns="0" rIns="0" tIns="0" bIns="0">
-            <a:spAutoFit/>
-          </a:bodyPr>
-          <a:lstStyle/>
-          <a:p>
-            <a:pPr algn="l">
-              <a:spcAft>
-                <a:spcPts val="400"/>
-              </a:spcAft>
-            </a:pPr>
-            <a:r>
-              <a:rPr sz="1050" b="1" i="0">
-                <a:solidFill>
-                  <a:srgbClr val="7823DC"/>
-                </a:solidFill>
-                <a:latin typeface="Yu Gothic"/>
-                <a:ea typeface="Yu Gothic"/>
-                <a:cs typeface="Yu Gothic"/>
-              </a:rPr>
-              <a:t>STO本体（2リード）</a:t>
-            </a:r>
-          </a:p>
-        </p:txBody>
-      </p:sp>
-      <p:sp>
-        <p:nvSpPr>
-          <p:cNvPr id="11" name="Rectangle 10"/>
-          <p:cNvSpPr/>
-          <p:nvPr/>
-        </p:nvSpPr>
-        <p:spPr>
-          <a:xfrm>
-            <a:off x="667512" y="3438144"/>
-            <a:ext cx="3200400" cy="1060704"/>
-          </a:xfrm>
-          <a:prstGeom prst="rect">
-            <a:avLst/>
-          </a:prstGeom>
-          <a:solidFill>
-            <a:srgbClr val="FFFFFF"/>
-          </a:solidFill>
-          <a:ln w="9525">
-            <a:solidFill>
-              <a:srgbClr val="D9D9E0"/>
-            </a:solidFill>
-          </a:ln>
-          <a:effectLst/>
-        </p:spPr>
-        <p:style>
-          <a:lnRef idx="1">
-            <a:schemeClr val="accent1"/>
-          </a:lnRef>
-          <a:fillRef idx="3">
-            <a:schemeClr val="accent1"/>
-          </a:fillRef>
-          <a:effectRef idx="2">
-            <a:schemeClr val="accent1"/>
-          </a:effectRef>
-          <a:fontRef idx="minor">
-            <a:schemeClr val="lt1"/>
-          </a:fontRef>
-        </p:style>
-        <p:txBody>
-          <a:bodyPr rtlCol="0" anchor="ctr"/>
-          <a:lstStyle/>
-          <a:p>
-            <a:pPr algn="ctr"/>
-          </a:p>
-        </p:txBody>
-      </p:sp>
-      <p:sp>
-        <p:nvSpPr>
-          <p:cNvPr id="12" name="Rectangle 11"/>
-          <p:cNvSpPr/>
-          <p:nvPr/>
-        </p:nvSpPr>
-        <p:spPr>
-          <a:xfrm>
-            <a:off x="667512" y="3438144"/>
-            <a:ext cx="64008" cy="1060704"/>
-          </a:xfrm>
-          <a:prstGeom prst="rect">
-            <a:avLst/>
-          </a:prstGeom>
-          <a:solidFill>
-            <a:srgbClr val="7823DC"/>
-          </a:solidFill>
-          <a:ln>
-            <a:noFill/>
-          </a:ln>
-          <a:effectLst/>
-        </p:spPr>
-        <p:style>
-          <a:lnRef idx="1">
-            <a:schemeClr val="accent1"/>
-          </a:lnRef>
-          <a:fillRef idx="3">
-            <a:schemeClr val="accent1"/>
-          </a:fillRef>
-          <a:effectRef idx="2">
-            <a:schemeClr val="accent1"/>
-          </a:effectRef>
-          <a:fontRef idx="minor">
-            <a:schemeClr val="lt1"/>
-          </a:fontRef>
-        </p:style>
-        <p:txBody>
-          <a:bodyPr rtlCol="0" anchor="ctr"/>
-          <a:lstStyle/>
-          <a:p>
-            <a:pPr algn="ctr"/>
-          </a:p>
-        </p:txBody>
-      </p:sp>
-      <p:sp>
-        <p:nvSpPr>
-          <p:cNvPr id="13" name="TextBox 12"/>
-          <p:cNvSpPr txBox="1"/>
-          <p:nvPr/>
-        </p:nvSpPr>
-        <p:spPr>
-          <a:xfrm>
-            <a:off x="850392" y="3529584"/>
-            <a:ext cx="2889504" cy="914400"/>
+            <a:off x="8001000" y="3163824"/>
+            <a:ext cx="3557016" cy="585216"/>
           </a:xfrm>
           <a:prstGeom prst="rect">
             <a:avLst/>
@@ -3608,33 +3918,15 @@
               </a:spcAft>
             </a:pPr>
             <a:r>
-              <a:rPr sz="1050" b="1" i="0">
-                <a:solidFill>
-                  <a:srgbClr val="3A106E"/>
-                </a:solidFill>
-                <a:latin typeface="Yu Gothic"/>
-                <a:ea typeface="Yu Gothic"/>
-                <a:cs typeface="Yu Gothic"/>
-              </a:rPr>
-              <a:t>坪井さん｜実行統制・データリード（兼務）</a:t>
-            </a:r>
-          </a:p>
-          <a:p>
-            <a:pPr algn="l">
-              <a:spcAft>
-                <a:spcPts val="200"/>
-              </a:spcAft>
-            </a:pPr>
-            <a:r>
-              <a:rPr sz="950" b="1" i="0">
-                <a:solidFill>
-                  <a:srgbClr val="7823DC"/>
-                </a:solidFill>
-                <a:latin typeface="Yu Gothic"/>
-                <a:ea typeface="Yu Gothic"/>
-                <a:cs typeface="Yu Gothic"/>
-              </a:rPr>
-              <a:t>改革の完遂</a:t>
+              <a:rPr sz="1000" b="1" i="0">
+                <a:solidFill>
+                  <a:srgbClr val="1E40AF"/>
+                </a:solidFill>
+                <a:latin typeface="Yu Gothic"/>
+                <a:ea typeface="Yu Gothic"/>
+                <a:cs typeface="Yu Gothic"/>
+              </a:rPr>
+              <a:t>大塩さん｜戦略サポート（兼務）</a:t>
             </a:r>
           </a:p>
           <a:p>
@@ -3644,281 +3936,9 @@
               </a:spcAft>
             </a:pPr>
             <a:r>
-              <a:rPr sz="900" b="0" i="0">
-                <a:solidFill>
-                  <a:srgbClr val="262630"/>
-                </a:solidFill>
-                <a:latin typeface="Yu Gothic"/>
-                <a:ea typeface="Yu Gothic"/>
-                <a:cs typeface="Yu Gothic"/>
-              </a:rPr>
-              <a:t>計画・KPI・データ品質・決定ログ・エスカレーション</a:t>
-            </a:r>
-          </a:p>
-        </p:txBody>
-      </p:sp>
-      <p:sp>
-        <p:nvSpPr>
-          <p:cNvPr id="14" name="Rectangle 13"/>
-          <p:cNvSpPr/>
-          <p:nvPr/>
-        </p:nvSpPr>
-        <p:spPr>
-          <a:xfrm>
-            <a:off x="4050792" y="3438144"/>
-            <a:ext cx="3200400" cy="1060704"/>
-          </a:xfrm>
-          <a:prstGeom prst="rect">
-            <a:avLst/>
-          </a:prstGeom>
-          <a:solidFill>
-            <a:srgbClr val="FFFFFF"/>
-          </a:solidFill>
-          <a:ln w="9525">
-            <a:solidFill>
-              <a:srgbClr val="D9D9E0"/>
-            </a:solidFill>
-          </a:ln>
-          <a:effectLst/>
-        </p:spPr>
-        <p:style>
-          <a:lnRef idx="1">
-            <a:schemeClr val="accent1"/>
-          </a:lnRef>
-          <a:fillRef idx="3">
-            <a:schemeClr val="accent1"/>
-          </a:fillRef>
-          <a:effectRef idx="2">
-            <a:schemeClr val="accent1"/>
-          </a:effectRef>
-          <a:fontRef idx="minor">
-            <a:schemeClr val="lt1"/>
-          </a:fontRef>
-        </p:style>
-        <p:txBody>
-          <a:bodyPr rtlCol="0" anchor="ctr"/>
-          <a:lstStyle/>
-          <a:p>
-            <a:pPr algn="ctr"/>
-          </a:p>
-        </p:txBody>
-      </p:sp>
-      <p:sp>
-        <p:nvSpPr>
-          <p:cNvPr id="15" name="Rectangle 14"/>
-          <p:cNvSpPr/>
-          <p:nvPr/>
-        </p:nvSpPr>
-        <p:spPr>
-          <a:xfrm>
-            <a:off x="4050792" y="3438144"/>
-            <a:ext cx="64008" cy="1060704"/>
-          </a:xfrm>
-          <a:prstGeom prst="rect">
-            <a:avLst/>
-          </a:prstGeom>
-          <a:solidFill>
-            <a:srgbClr val="7823DC"/>
-          </a:solidFill>
-          <a:ln>
-            <a:noFill/>
-          </a:ln>
-          <a:effectLst/>
-        </p:spPr>
-        <p:style>
-          <a:lnRef idx="1">
-            <a:schemeClr val="accent1"/>
-          </a:lnRef>
-          <a:fillRef idx="3">
-            <a:schemeClr val="accent1"/>
-          </a:fillRef>
-          <a:effectRef idx="2">
-            <a:schemeClr val="accent1"/>
-          </a:effectRef>
-          <a:fontRef idx="minor">
-            <a:schemeClr val="lt1"/>
-          </a:fontRef>
-        </p:style>
-        <p:txBody>
-          <a:bodyPr rtlCol="0" anchor="ctr"/>
-          <a:lstStyle/>
-          <a:p>
-            <a:pPr algn="ctr"/>
-          </a:p>
-        </p:txBody>
-      </p:sp>
-      <p:sp>
-        <p:nvSpPr>
-          <p:cNvPr id="16" name="TextBox 15"/>
-          <p:cNvSpPr txBox="1"/>
-          <p:nvPr/>
-        </p:nvSpPr>
-        <p:spPr>
-          <a:xfrm>
-            <a:off x="4233672" y="3529584"/>
-            <a:ext cx="2889504" cy="914400"/>
-          </a:xfrm>
-          <a:prstGeom prst="rect">
-            <a:avLst/>
-          </a:prstGeom>
-          <a:noFill/>
-        </p:spPr>
-        <p:txBody>
-          <a:bodyPr wrap="square" lIns="0" rIns="0" tIns="0" bIns="0">
-            <a:spAutoFit/>
-          </a:bodyPr>
-          <a:lstStyle/>
-          <a:p>
-            <a:pPr algn="l">
-              <a:spcAft>
-                <a:spcPts val="200"/>
-              </a:spcAft>
-            </a:pPr>
-            <a:r>
-              <a:rPr sz="1050" b="1" i="0">
-                <a:solidFill>
-                  <a:srgbClr val="3A106E"/>
-                </a:solidFill>
-                <a:latin typeface="Yu Gothic"/>
-                <a:ea typeface="Yu Gothic"/>
-                <a:cs typeface="Yu Gothic"/>
-              </a:rPr>
-              <a:t>小沢さん｜変革設計リード（専任）</a:t>
-            </a:r>
-          </a:p>
-          <a:p>
-            <a:pPr algn="l">
-              <a:spcAft>
-                <a:spcPts val="200"/>
-              </a:spcAft>
-            </a:pPr>
-            <a:r>
-              <a:rPr sz="950" b="1" i="0">
-                <a:solidFill>
-                  <a:srgbClr val="7823DC"/>
-                </a:solidFill>
-                <a:latin typeface="Yu Gothic"/>
-                <a:ea typeface="Yu Gothic"/>
-                <a:cs typeface="Yu Gothic"/>
-              </a:rPr>
-              <a:t>改革の中身</a:t>
-            </a:r>
-          </a:p>
-          <a:p>
-            <a:pPr algn="l">
-              <a:spcAft>
-                <a:spcPts val="0"/>
-              </a:spcAft>
-            </a:pPr>
-            <a:r>
-              <a:rPr sz="900" b="0" i="0">
-                <a:solidFill>
-                  <a:srgbClr val="262630"/>
-                </a:solidFill>
-                <a:latin typeface="Yu Gothic"/>
-                <a:ea typeface="Yu Gothic"/>
-                <a:cs typeface="Yu Gothic"/>
-              </a:rPr>
-              <a:t>課題設計・プロセス再設計・意思決定書・パイロット</a:t>
-            </a:r>
-          </a:p>
-        </p:txBody>
-      </p:sp>
-      <p:sp>
-        <p:nvSpPr>
-          <p:cNvPr id="17" name="Rectangle 16"/>
-          <p:cNvSpPr/>
-          <p:nvPr/>
-        </p:nvSpPr>
-        <p:spPr>
-          <a:xfrm>
-            <a:off x="7818120" y="3072384"/>
-            <a:ext cx="3867912" cy="731520"/>
-          </a:xfrm>
-          <a:prstGeom prst="rect">
-            <a:avLst/>
-          </a:prstGeom>
-          <a:solidFill>
-            <a:srgbClr val="F3EFFB"/>
-          </a:solidFill>
-          <a:ln w="9525">
-            <a:solidFill>
-              <a:srgbClr val="5F5F6E"/>
-            </a:solidFill>
-          </a:ln>
-          <a:effectLst/>
-        </p:spPr>
-        <p:style>
-          <a:lnRef idx="1">
-            <a:schemeClr val="accent1"/>
-          </a:lnRef>
-          <a:fillRef idx="3">
-            <a:schemeClr val="accent1"/>
-          </a:fillRef>
-          <a:effectRef idx="2">
-            <a:schemeClr val="accent1"/>
-          </a:effectRef>
-          <a:fontRef idx="minor">
-            <a:schemeClr val="lt1"/>
-          </a:fontRef>
-        </p:style>
-        <p:txBody>
-          <a:bodyPr rtlCol="0" anchor="ctr"/>
-          <a:lstStyle/>
-          <a:p>
-            <a:pPr algn="ctr"/>
-          </a:p>
-        </p:txBody>
-      </p:sp>
-      <p:sp>
-        <p:nvSpPr>
-          <p:cNvPr id="18" name="TextBox 17"/>
-          <p:cNvSpPr txBox="1"/>
-          <p:nvPr/>
-        </p:nvSpPr>
-        <p:spPr>
-          <a:xfrm>
-            <a:off x="8001000" y="3163824"/>
-            <a:ext cx="3557016" cy="585216"/>
-          </a:xfrm>
-          <a:prstGeom prst="rect">
-            <a:avLst/>
-          </a:prstGeom>
-          <a:noFill/>
-        </p:spPr>
-        <p:txBody>
-          <a:bodyPr wrap="square" lIns="0" rIns="0" tIns="0" bIns="0">
-            <a:spAutoFit/>
-          </a:bodyPr>
-          <a:lstStyle/>
-          <a:p>
-            <a:pPr algn="l">
-              <a:spcAft>
-                <a:spcPts val="200"/>
-              </a:spcAft>
-            </a:pPr>
-            <a:r>
-              <a:rPr sz="1000" b="1" i="0">
-                <a:solidFill>
-                  <a:srgbClr val="3A106E"/>
-                </a:solidFill>
-                <a:latin typeface="Yu Gothic"/>
-                <a:ea typeface="Yu Gothic"/>
-                <a:cs typeface="Yu Gothic"/>
-              </a:rPr>
-              <a:t>大塩さん｜戦略サポート（兼務）</a:t>
-            </a:r>
-          </a:p>
-          <a:p>
-            <a:pPr algn="l">
-              <a:spcAft>
-                <a:spcPts val="0"/>
-              </a:spcAft>
-            </a:pPr>
-            <a:r>
               <a:rPr sz="850" b="0" i="0">
                 <a:solidFill>
-                  <a:srgbClr val="262630"/>
+                  <a:srgbClr val="1B1B26"/>
                 </a:solidFill>
                 <a:latin typeface="Yu Gothic"/>
                 <a:ea typeface="Yu Gothic"/>
@@ -3945,7 +3965,7 @@
           </a:prstGeom>
           <a:ln w="19050">
             <a:solidFill>
-              <a:srgbClr val="5F5F6E"/>
+              <a:srgbClr val="6B7280"/>
             </a:solidFill>
             <a:prstDash val="dash"/>
           </a:ln>
@@ -3981,11 +4001,11 @@
             <a:avLst/>
           </a:prstGeom>
           <a:solidFill>
-            <a:srgbClr val="F3EFFB"/>
+            <a:srgbClr val="EAF1FE"/>
           </a:solidFill>
           <a:ln w="9525">
             <a:solidFill>
-              <a:srgbClr val="5F5F6E"/>
+              <a:srgbClr val="6B7280"/>
             </a:solidFill>
           </a:ln>
           <a:effectLst/>
@@ -4042,7 +4062,7 @@
             <a:r>
               <a:rPr sz="950" b="1" i="0">
                 <a:solidFill>
-                  <a:srgbClr val="3A106E"/>
+                  <a:srgbClr val="1E40AF"/>
                 </a:solidFill>
                 <a:latin typeface="Yu Gothic"/>
                 <a:ea typeface="Yu Gothic"/>
@@ -4060,7 +4080,7 @@
             <a:r>
               <a:rPr sz="850" b="0" i="0">
                 <a:solidFill>
-                  <a:srgbClr val="262630"/>
+                  <a:srgbClr val="1B1B26"/>
                 </a:solidFill>
                 <a:latin typeface="Yu Gothic"/>
                 <a:ea typeface="Yu Gothic"/>
@@ -4087,7 +4107,7 @@
           </a:prstGeom>
           <a:ln w="19050">
             <a:solidFill>
-              <a:srgbClr val="5F5F6E"/>
+              <a:srgbClr val="6B7280"/>
             </a:solidFill>
             <a:prstDash val="dash"/>
           </a:ln>
@@ -4123,7 +4143,7 @@
             <a:avLst/>
           </a:prstGeom>
           <a:solidFill>
-            <a:srgbClr val="7823DC"/>
+            <a:srgbClr val="2563EB"/>
           </a:solidFill>
           <a:ln>
             <a:noFill/>
@@ -4182,7 +4202,7 @@
             <a:r>
               <a:rPr sz="900" b="1" i="0">
                 <a:solidFill>
-                  <a:srgbClr val="7823DC"/>
+                  <a:srgbClr val="2563EB"/>
                 </a:solidFill>
                 <a:latin typeface="Yu Gothic"/>
                 <a:ea typeface="Yu Gothic"/>
@@ -4208,7 +4228,7 @@
             <a:avLst/>
           </a:prstGeom>
           <a:solidFill>
-            <a:srgbClr val="3A106E"/>
+            <a:srgbClr val="1E40AF"/>
           </a:solidFill>
           <a:ln>
             <a:noFill/>
@@ -4285,7 +4305,7 @@
             <a:r>
               <a:rPr sz="800" b="0" i="0">
                 <a:solidFill>
-                  <a:srgbClr val="D8C8F0"/>
+                  <a:srgbClr val="BFD4FE"/>
                 </a:solidFill>
                 <a:latin typeface="Yu Gothic"/>
                 <a:ea typeface="Yu Gothic"/>
@@ -4311,7 +4331,7 @@
             <a:avLst/>
           </a:prstGeom>
           <a:solidFill>
-            <a:srgbClr val="3A106E"/>
+            <a:srgbClr val="1E40AF"/>
           </a:solidFill>
           <a:ln>
             <a:noFill/>
@@ -4388,7 +4408,7 @@
             <a:r>
               <a:rPr sz="800" b="0" i="0">
                 <a:solidFill>
-                  <a:srgbClr val="D8C8F0"/>
+                  <a:srgbClr val="BFD4FE"/>
                 </a:solidFill>
                 <a:latin typeface="Yu Gothic"/>
                 <a:ea typeface="Yu Gothic"/>
@@ -4414,7 +4434,7 @@
             <a:avLst/>
           </a:prstGeom>
           <a:solidFill>
-            <a:srgbClr val="3A106E"/>
+            <a:srgbClr val="1E40AF"/>
           </a:solidFill>
           <a:ln>
             <a:noFill/>
@@ -4491,7 +4511,7 @@
             <a:r>
               <a:rPr sz="800" b="0" i="0">
                 <a:solidFill>
-                  <a:srgbClr val="D8C8F0"/>
+                  <a:srgbClr val="BFD4FE"/>
                 </a:solidFill>
                 <a:latin typeface="Yu Gothic"/>
                 <a:ea typeface="Yu Gothic"/>
@@ -4517,7 +4537,7 @@
             <a:avLst/>
           </a:prstGeom>
           <a:solidFill>
-            <a:srgbClr val="F3EFFB"/>
+            <a:srgbClr val="EAF1FE"/>
           </a:solidFill>
           <a:ln>
             <a:noFill/>
@@ -4561,7 +4581,7 @@
             <a:avLst/>
           </a:prstGeom>
           <a:solidFill>
-            <a:srgbClr val="7823DC"/>
+            <a:srgbClr val="2563EB"/>
           </a:solidFill>
           <a:ln>
             <a:noFill/>
@@ -4620,7 +4640,7 @@
             <a:r>
               <a:rPr sz="1000" b="1" i="0">
                 <a:solidFill>
-                  <a:srgbClr val="7823DC"/>
+                  <a:srgbClr val="2563EB"/>
                 </a:solidFill>
                 <a:latin typeface="Yu Gothic"/>
                 <a:ea typeface="Yu Gothic"/>
@@ -4631,7 +4651,7 @@
             <a:r>
               <a:rPr sz="1000" b="0" i="0">
                 <a:solidFill>
-                  <a:srgbClr val="262630"/>
+                  <a:srgbClr val="1B1B26"/>
                 </a:solidFill>
                 <a:latin typeface="Yu Gothic"/>
                 <a:ea typeface="Yu Gothic"/>
@@ -4657,7 +4677,7 @@
             <a:avLst/>
           </a:prstGeom>
           <a:solidFill>
-            <a:srgbClr val="D9D9E0"/>
+            <a:srgbClr val="E5E7EB"/>
           </a:solidFill>
           <a:ln>
             <a:noFill/>
@@ -4716,7 +4736,7 @@
             <a:r>
               <a:rPr sz="750" b="0" i="0">
                 <a:solidFill>
-                  <a:srgbClr val="8A8A99"/>
+                  <a:srgbClr val="8A8F9C"/>
                 </a:solidFill>
                 <a:latin typeface="Yu Gothic"/>
                 <a:ea typeface="Yu Gothic"/>
@@ -4757,7 +4777,7 @@
             <a:r>
               <a:rPr sz="900" b="0" i="0">
                 <a:solidFill>
-                  <a:srgbClr val="5F5F6E"/>
+                  <a:srgbClr val="6B7280"/>
                 </a:solidFill>
                 <a:latin typeface="Yu Gothic"/>
                 <a:ea typeface="Yu Gothic"/>
@@ -4788,14 +4808,160 @@
       <p:grpSpPr/>
       <p:sp>
         <p:nvSpPr>
-          <p:cNvPr id="2" name="TextBox 1"/>
+          <p:cNvPr id="2" name="Rounded Rectangle 1"/>
+          <p:cNvSpPr/>
+          <p:nvPr/>
+        </p:nvSpPr>
+        <p:spPr>
+          <a:xfrm>
+            <a:off x="502920" y="274320"/>
+            <a:ext cx="1696212" cy="274320"/>
+          </a:xfrm>
+          <a:prstGeom prst="roundRect">
+            <a:avLst>
+              <a:gd name="adj" fmla="val 50000"/>
+            </a:avLst>
+          </a:prstGeom>
+          <a:solidFill>
+            <a:srgbClr val="EAF1FE"/>
+          </a:solidFill>
+          <a:ln>
+            <a:noFill/>
+          </a:ln>
+          <a:effectLst/>
+        </p:spPr>
+        <p:style>
+          <a:lnRef idx="1">
+            <a:schemeClr val="accent1"/>
+          </a:lnRef>
+          <a:fillRef idx="3">
+            <a:schemeClr val="accent1"/>
+          </a:fillRef>
+          <a:effectRef idx="2">
+            <a:schemeClr val="accent1"/>
+          </a:effectRef>
+          <a:fontRef idx="minor">
+            <a:schemeClr val="lt1"/>
+          </a:fontRef>
+        </p:style>
+        <p:txBody>
+          <a:bodyPr rtlCol="0" anchor="ctr" wrap="none" lIns="109728" rIns="109728" tIns="0" bIns="0"/>
+          <a:lstStyle/>
+          <a:p>
+            <a:pPr algn="l">
+              <a:spcAft>
+                <a:spcPts val="0"/>
+              </a:spcAft>
+            </a:pPr>
+            <a:r>
+              <a:rPr sz="900" b="1" i="0">
+                <a:solidFill>
+                  <a:srgbClr val="2563EB"/>
+                </a:solidFill>
+                <a:latin typeface="Yu Gothic"/>
+                <a:ea typeface="Yu Gothic"/>
+                <a:cs typeface="Yu Gothic"/>
+              </a:rPr>
+              <a:t>STO — 週次運用リズム</a:t>
+            </a:r>
+          </a:p>
+        </p:txBody>
+      </p:sp>
+      <p:sp>
+        <p:nvSpPr>
+          <p:cNvPr id="3" name="TextBox 2"/>
           <p:cNvSpPr txBox="1"/>
           <p:nvPr/>
         </p:nvSpPr>
         <p:spPr>
           <a:xfrm>
-            <a:off x="502920" y="256032"/>
-            <a:ext cx="11155680" cy="256032"/>
+            <a:off x="502920" y="566928"/>
+            <a:ext cx="11155680" cy="804672"/>
+          </a:xfrm>
+          <a:prstGeom prst="rect">
+            <a:avLst/>
+          </a:prstGeom>
+          <a:noFill/>
+        </p:spPr>
+        <p:txBody>
+          <a:bodyPr wrap="square" lIns="0" rIns="0" tIns="0" bIns="0">
+            <a:spAutoFit/>
+          </a:bodyPr>
+          <a:lstStyle/>
+          <a:p>
+            <a:pPr algn="l">
+              <a:spcAft>
+                <a:spcPts val="0"/>
+              </a:spcAft>
+            </a:pPr>
+            <a:r>
+              <a:rPr sz="1800" b="1" i="0">
+                <a:solidFill>
+                  <a:srgbClr val="1B1B26"/>
+                </a:solidFill>
+                <a:latin typeface="Yu Gothic"/>
+                <a:ea typeface="Yu Gothic"/>
+                <a:cs typeface="Yu Gothic"/>
+              </a:rPr>
+              <a:t>STOの週次運用リズム</a:t>
+            </a:r>
+          </a:p>
+        </p:txBody>
+      </p:sp>
+      <p:sp>
+        <p:nvSpPr>
+          <p:cNvPr id="4" name="Rectangle 3"/>
+          <p:cNvSpPr/>
+          <p:nvPr/>
+        </p:nvSpPr>
+        <p:spPr>
+          <a:xfrm>
+            <a:off x="502920" y="1335024"/>
+            <a:ext cx="11183112" cy="11430"/>
+          </a:xfrm>
+          <a:prstGeom prst="rect">
+            <a:avLst/>
+          </a:prstGeom>
+          <a:solidFill>
+            <a:srgbClr val="E5E7EB"/>
+          </a:solidFill>
+          <a:ln>
+            <a:noFill/>
+          </a:ln>
+          <a:effectLst/>
+        </p:spPr>
+        <p:style>
+          <a:lnRef idx="1">
+            <a:schemeClr val="accent1"/>
+          </a:lnRef>
+          <a:fillRef idx="3">
+            <a:schemeClr val="accent1"/>
+          </a:fillRef>
+          <a:effectRef idx="2">
+            <a:schemeClr val="accent1"/>
+          </a:effectRef>
+          <a:fontRef idx="minor">
+            <a:schemeClr val="lt1"/>
+          </a:fontRef>
+        </p:style>
+        <p:txBody>
+          <a:bodyPr rtlCol="0" anchor="ctr"/>
+          <a:lstStyle/>
+          <a:p>
+            <a:pPr algn="ctr"/>
+          </a:p>
+        </p:txBody>
+      </p:sp>
+      <p:sp>
+        <p:nvSpPr>
+          <p:cNvPr id="5" name="TextBox 4"/>
+          <p:cNvSpPr txBox="1"/>
+          <p:nvPr/>
+        </p:nvSpPr>
+        <p:spPr>
+          <a:xfrm>
+            <a:off x="502920" y="1481328"/>
+            <a:ext cx="11155680" cy="310896"/>
           </a:xfrm>
           <a:prstGeom prst="rect">
             <a:avLst/>
@@ -4814,29 +4980,171 @@
               </a:spcAft>
             </a:pPr>
             <a:r>
-              <a:rPr sz="1000" b="1" i="0">
-                <a:solidFill>
-                  <a:srgbClr val="7823DC"/>
-                </a:solidFill>
-                <a:latin typeface="Yu Gothic"/>
-                <a:ea typeface="Yu Gothic"/>
-                <a:cs typeface="Yu Gothic"/>
-              </a:rPr>
-              <a:t>STO — 週次運用リズム</a:t>
-            </a:r>
-          </a:p>
-        </p:txBody>
-      </p:sp>
-      <p:sp>
-        <p:nvSpPr>
-          <p:cNvPr id="3" name="TextBox 2"/>
+              <a:rPr sz="1150" b="1" i="0">
+                <a:solidFill>
+                  <a:srgbClr val="2563EB"/>
+                </a:solidFill>
+                <a:latin typeface="Yu Gothic"/>
+                <a:ea typeface="Yu Gothic"/>
+                <a:cs typeface="Yu Gothic"/>
+              </a:rPr>
+              <a:t>毎週この型で運転する。滞留を機械的に検知し、24時間で解けない詰まりは抱えずに上へ</a:t>
+            </a:r>
+          </a:p>
+        </p:txBody>
+      </p:sp>
+      <p:sp>
+        <p:nvSpPr>
+          <p:cNvPr id="6" name="Rectangle 5"/>
+          <p:cNvSpPr/>
+          <p:nvPr/>
+        </p:nvSpPr>
+        <p:spPr>
+          <a:xfrm>
+            <a:off x="502920" y="1993392"/>
+            <a:ext cx="2176272" cy="457200"/>
+          </a:xfrm>
+          <a:prstGeom prst="rect">
+            <a:avLst/>
+          </a:prstGeom>
+          <a:solidFill>
+            <a:srgbClr val="2563EB"/>
+          </a:solidFill>
+          <a:ln>
+            <a:noFill/>
+          </a:ln>
+          <a:effectLst/>
+        </p:spPr>
+        <p:style>
+          <a:lnRef idx="1">
+            <a:schemeClr val="accent1"/>
+          </a:lnRef>
+          <a:fillRef idx="3">
+            <a:schemeClr val="accent1"/>
+          </a:fillRef>
+          <a:effectRef idx="2">
+            <a:schemeClr val="accent1"/>
+          </a:effectRef>
+          <a:fontRef idx="minor">
+            <a:schemeClr val="lt1"/>
+          </a:fontRef>
+        </p:style>
+        <p:txBody>
+          <a:bodyPr rtlCol="0" anchor="ctr"/>
+          <a:lstStyle/>
+          <a:p>
+            <a:pPr algn="ctr"/>
+          </a:p>
+        </p:txBody>
+      </p:sp>
+      <p:sp>
+        <p:nvSpPr>
+          <p:cNvPr id="7" name="TextBox 6"/>
           <p:cNvSpPr txBox="1"/>
           <p:nvPr/>
         </p:nvSpPr>
         <p:spPr>
           <a:xfrm>
-            <a:off x="502920" y="512064"/>
-            <a:ext cx="11155680" cy="868680"/>
+            <a:off x="502920" y="2020824"/>
+            <a:ext cx="2176272" cy="402336"/>
+          </a:xfrm>
+          <a:prstGeom prst="rect">
+            <a:avLst/>
+          </a:prstGeom>
+          <a:noFill/>
+        </p:spPr>
+        <p:txBody>
+          <a:bodyPr wrap="square" lIns="0" rIns="0" tIns="0" bIns="0" anchor="ctr">
+            <a:spAutoFit/>
+          </a:bodyPr>
+          <a:lstStyle/>
+          <a:p>
+            <a:pPr algn="ctr">
+              <a:spcAft>
+                <a:spcPts val="0"/>
+              </a:spcAft>
+            </a:pPr>
+            <a:r>
+              <a:rPr sz="1500" b="1" i="0">
+                <a:solidFill>
+                  <a:srgbClr val="FFFFFF"/>
+                </a:solidFill>
+                <a:latin typeface="Yu Gothic"/>
+                <a:ea typeface="Yu Gothic"/>
+                <a:cs typeface="Yu Gothic"/>
+              </a:rPr>
+              <a:t>月</a:t>
+            </a:r>
+            <a:r>
+              <a:rPr sz="850" b="0" i="0">
+                <a:solidFill>
+                  <a:srgbClr val="BFD4FE"/>
+                </a:solidFill>
+                <a:latin typeface="Yu Gothic"/>
+                <a:ea typeface="Yu Gothic"/>
+                <a:cs typeface="Yu Gothic"/>
+              </a:rPr>
+              <a:t>  MON</a:t>
+            </a:r>
+          </a:p>
+        </p:txBody>
+      </p:sp>
+      <p:sp>
+        <p:nvSpPr>
+          <p:cNvPr id="8" name="Rectangle 7"/>
+          <p:cNvSpPr/>
+          <p:nvPr/>
+        </p:nvSpPr>
+        <p:spPr>
+          <a:xfrm>
+            <a:off x="502920" y="2450592"/>
+            <a:ext cx="2176272" cy="2542032"/>
+          </a:xfrm>
+          <a:prstGeom prst="rect">
+            <a:avLst/>
+          </a:prstGeom>
+          <a:solidFill>
+            <a:srgbClr val="FFFFFF"/>
+          </a:solidFill>
+          <a:ln w="9525">
+            <a:solidFill>
+              <a:srgbClr val="E5E7EB"/>
+            </a:solidFill>
+          </a:ln>
+          <a:effectLst/>
+        </p:spPr>
+        <p:style>
+          <a:lnRef idx="1">
+            <a:schemeClr val="accent1"/>
+          </a:lnRef>
+          <a:fillRef idx="3">
+            <a:schemeClr val="accent1"/>
+          </a:fillRef>
+          <a:effectRef idx="2">
+            <a:schemeClr val="accent1"/>
+          </a:effectRef>
+          <a:fontRef idx="minor">
+            <a:schemeClr val="lt1"/>
+          </a:fontRef>
+        </p:style>
+        <p:txBody>
+          <a:bodyPr rtlCol="0" anchor="ctr"/>
+          <a:lstStyle/>
+          <a:p>
+            <a:pPr algn="ctr"/>
+          </a:p>
+        </p:txBody>
+      </p:sp>
+      <p:sp>
+        <p:nvSpPr>
+          <p:cNvPr id="9" name="TextBox 8"/>
+          <p:cNvSpPr txBox="1"/>
+          <p:nvPr/>
+        </p:nvSpPr>
+        <p:spPr>
+          <a:xfrm>
+            <a:off x="630936" y="2560320"/>
+            <a:ext cx="1938528" cy="2340864"/>
           </a:xfrm>
           <a:prstGeom prst="rect">
             <a:avLst/>
@@ -4848,6 +5156,1245 @@
             <a:spAutoFit/>
           </a:bodyPr>
           <a:lstStyle/>
+          <a:p>
+            <a:pPr algn="l">
+              <a:spcAft>
+                <a:spcPts val="300"/>
+              </a:spcAft>
+            </a:pPr>
+            <a:r>
+              <a:rPr sz="950" b="1" i="0">
+                <a:solidFill>
+                  <a:srgbClr val="1E40AF"/>
+                </a:solidFill>
+                <a:latin typeface="Yu Gothic"/>
+                <a:ea typeface="Yu Gothic"/>
+                <a:cs typeface="Yu Gothic"/>
+              </a:rPr>
+              <a:t>スケジュール確定</a:t>
+            </a:r>
+          </a:p>
+          <a:p>
+            <a:pPr algn="l">
+              <a:spcAft>
+                <a:spcPts val="300"/>
+              </a:spcAft>
+            </a:pPr>
+            <a:r>
+              <a:rPr sz="850" b="0" i="0">
+                <a:solidFill>
+                  <a:srgbClr val="1B1B26"/>
+                </a:solidFill>
+                <a:latin typeface="Yu Gothic"/>
+                <a:ea typeface="Yu Gothic"/>
+                <a:cs typeface="Yu Gothic"/>
+              </a:rPr>
+              <a:t>・今週の会議体日程を確定</a:t>
+            </a:r>
+          </a:p>
+          <a:p>
+            <a:pPr algn="l">
+              <a:spcAft>
+                <a:spcPts val="300"/>
+              </a:spcAft>
+            </a:pPr>
+            <a:r>
+              <a:rPr sz="850" b="0" i="0">
+                <a:solidFill>
+                  <a:srgbClr val="1B1B26"/>
+                </a:solidFill>
+                <a:latin typeface="Yu Gothic"/>
+                <a:ea typeface="Yu Gothic"/>
+                <a:cs typeface="Yu Gothic"/>
+              </a:rPr>
+              <a:t>・アジェンダドラフト配布</a:t>
+            </a:r>
+          </a:p>
+          <a:p>
+            <a:pPr algn="l">
+              <a:spcAft>
+                <a:spcPts val="300"/>
+              </a:spcAft>
+            </a:pPr>
+            <a:r>
+              <a:rPr sz="950" b="1" i="0">
+                <a:solidFill>
+                  <a:srgbClr val="1E40AF"/>
+                </a:solidFill>
+                <a:latin typeface="Yu Gothic"/>
+                <a:ea typeface="Yu Gothic"/>
+                <a:cs typeface="Yu Gothic"/>
+              </a:rPr>
+              <a:t>マスター週次更新</a:t>
+            </a:r>
+          </a:p>
+          <a:p>
+            <a:pPr algn="l">
+              <a:spcAft>
+                <a:spcPts val="300"/>
+              </a:spcAft>
+            </a:pPr>
+            <a:r>
+              <a:rPr sz="850" b="0" i="0">
+                <a:solidFill>
+                  <a:srgbClr val="1B1B26"/>
+                </a:solidFill>
+                <a:latin typeface="Yu Gothic"/>
+                <a:ea typeface="Yu Gothic"/>
+                <a:cs typeface="Yu Gothic"/>
+              </a:rPr>
+              <a:t>・キュー処理・データ反映</a:t>
+            </a:r>
+          </a:p>
+        </p:txBody>
+      </p:sp>
+      <p:sp>
+        <p:nvSpPr>
+          <p:cNvPr id="10" name="Rectangle 9"/>
+          <p:cNvSpPr/>
+          <p:nvPr/>
+        </p:nvSpPr>
+        <p:spPr>
+          <a:xfrm>
+            <a:off x="2761487" y="1993392"/>
+            <a:ext cx="2176272" cy="457200"/>
+          </a:xfrm>
+          <a:prstGeom prst="rect">
+            <a:avLst/>
+          </a:prstGeom>
+          <a:solidFill>
+            <a:srgbClr val="2563EB"/>
+          </a:solidFill>
+          <a:ln>
+            <a:noFill/>
+          </a:ln>
+          <a:effectLst/>
+        </p:spPr>
+        <p:style>
+          <a:lnRef idx="1">
+            <a:schemeClr val="accent1"/>
+          </a:lnRef>
+          <a:fillRef idx="3">
+            <a:schemeClr val="accent1"/>
+          </a:fillRef>
+          <a:effectRef idx="2">
+            <a:schemeClr val="accent1"/>
+          </a:effectRef>
+          <a:fontRef idx="minor">
+            <a:schemeClr val="lt1"/>
+          </a:fontRef>
+        </p:style>
+        <p:txBody>
+          <a:bodyPr rtlCol="0" anchor="ctr"/>
+          <a:lstStyle/>
+          <a:p>
+            <a:pPr algn="ctr"/>
+          </a:p>
+        </p:txBody>
+      </p:sp>
+      <p:sp>
+        <p:nvSpPr>
+          <p:cNvPr id="11" name="TextBox 10"/>
+          <p:cNvSpPr txBox="1"/>
+          <p:nvPr/>
+        </p:nvSpPr>
+        <p:spPr>
+          <a:xfrm>
+            <a:off x="2761487" y="2020824"/>
+            <a:ext cx="2176272" cy="402336"/>
+          </a:xfrm>
+          <a:prstGeom prst="rect">
+            <a:avLst/>
+          </a:prstGeom>
+          <a:noFill/>
+        </p:spPr>
+        <p:txBody>
+          <a:bodyPr wrap="square" lIns="0" rIns="0" tIns="0" bIns="0" anchor="ctr">
+            <a:spAutoFit/>
+          </a:bodyPr>
+          <a:lstStyle/>
+          <a:p>
+            <a:pPr algn="ctr">
+              <a:spcAft>
+                <a:spcPts val="0"/>
+              </a:spcAft>
+            </a:pPr>
+            <a:r>
+              <a:rPr sz="1500" b="1" i="0">
+                <a:solidFill>
+                  <a:srgbClr val="FFFFFF"/>
+                </a:solidFill>
+                <a:latin typeface="Yu Gothic"/>
+                <a:ea typeface="Yu Gothic"/>
+                <a:cs typeface="Yu Gothic"/>
+              </a:rPr>
+              <a:t>火</a:t>
+            </a:r>
+            <a:r>
+              <a:rPr sz="850" b="0" i="0">
+                <a:solidFill>
+                  <a:srgbClr val="BFD4FE"/>
+                </a:solidFill>
+                <a:latin typeface="Yu Gothic"/>
+                <a:ea typeface="Yu Gothic"/>
+                <a:cs typeface="Yu Gothic"/>
+              </a:rPr>
+              <a:t>  TUE</a:t>
+            </a:r>
+          </a:p>
+        </p:txBody>
+      </p:sp>
+      <p:sp>
+        <p:nvSpPr>
+          <p:cNvPr id="12" name="Rectangle 11"/>
+          <p:cNvSpPr/>
+          <p:nvPr/>
+        </p:nvSpPr>
+        <p:spPr>
+          <a:xfrm>
+            <a:off x="2761487" y="2450592"/>
+            <a:ext cx="2176272" cy="2542032"/>
+          </a:xfrm>
+          <a:prstGeom prst="rect">
+            <a:avLst/>
+          </a:prstGeom>
+          <a:solidFill>
+            <a:srgbClr val="FFFFFF"/>
+          </a:solidFill>
+          <a:ln w="9525">
+            <a:solidFill>
+              <a:srgbClr val="E5E7EB"/>
+            </a:solidFill>
+          </a:ln>
+          <a:effectLst/>
+        </p:spPr>
+        <p:style>
+          <a:lnRef idx="1">
+            <a:schemeClr val="accent1"/>
+          </a:lnRef>
+          <a:fillRef idx="3">
+            <a:schemeClr val="accent1"/>
+          </a:fillRef>
+          <a:effectRef idx="2">
+            <a:schemeClr val="accent1"/>
+          </a:effectRef>
+          <a:fontRef idx="minor">
+            <a:schemeClr val="lt1"/>
+          </a:fontRef>
+        </p:style>
+        <p:txBody>
+          <a:bodyPr rtlCol="0" anchor="ctr"/>
+          <a:lstStyle/>
+          <a:p>
+            <a:pPr algn="ctr"/>
+          </a:p>
+        </p:txBody>
+      </p:sp>
+      <p:sp>
+        <p:nvSpPr>
+          <p:cNvPr id="13" name="TextBox 12"/>
+          <p:cNvSpPr txBox="1"/>
+          <p:nvPr/>
+        </p:nvSpPr>
+        <p:spPr>
+          <a:xfrm>
+            <a:off x="2889503" y="2560320"/>
+            <a:ext cx="1938528" cy="2340864"/>
+          </a:xfrm>
+          <a:prstGeom prst="rect">
+            <a:avLst/>
+          </a:prstGeom>
+          <a:noFill/>
+        </p:spPr>
+        <p:txBody>
+          <a:bodyPr wrap="square" lIns="0" rIns="0" tIns="0" bIns="0">
+            <a:spAutoFit/>
+          </a:bodyPr>
+          <a:lstStyle/>
+          <a:p>
+            <a:pPr algn="l">
+              <a:spcAft>
+                <a:spcPts val="300"/>
+              </a:spcAft>
+            </a:pPr>
+            <a:r>
+              <a:rPr sz="950" b="1" i="0">
+                <a:solidFill>
+                  <a:srgbClr val="1E40AF"/>
+                </a:solidFill>
+                <a:latin typeface="Yu Gothic"/>
+                <a:ea typeface="Yu Gothic"/>
+                <a:cs typeface="Yu Gothic"/>
+              </a:rPr>
+              <a:t>分科会デー</a:t>
+            </a:r>
+          </a:p>
+          <a:p>
+            <a:pPr algn="l">
+              <a:spcAft>
+                <a:spcPts val="300"/>
+              </a:spcAft>
+            </a:pPr>
+            <a:r>
+              <a:rPr sz="850" b="0" i="0">
+                <a:solidFill>
+                  <a:srgbClr val="1B1B26"/>
+                </a:solidFill>
+                <a:latin typeface="Yu Gothic"/>
+                <a:ea typeface="Yu Gothic"/>
+                <a:cs typeface="Yu Gothic"/>
+              </a:rPr>
+              <a:t>・3分科会を並行/ずらし開催</a:t>
+            </a:r>
+          </a:p>
+          <a:p>
+            <a:pPr algn="l">
+              <a:spcAft>
+                <a:spcPts val="300"/>
+              </a:spcAft>
+            </a:pPr>
+            <a:r>
+              <a:rPr sz="850" b="0" i="0">
+                <a:solidFill>
+                  <a:srgbClr val="1B1B26"/>
+                </a:solidFill>
+                <a:latin typeface="Yu Gothic"/>
+                <a:ea typeface="Yu Gothic"/>
+                <a:cs typeface="Yu Gothic"/>
+              </a:rPr>
+              <a:t>・データパック供給（坪井）</a:t>
+            </a:r>
+          </a:p>
+          <a:p>
+            <a:pPr algn="l">
+              <a:spcAft>
+                <a:spcPts val="300"/>
+              </a:spcAft>
+            </a:pPr>
+            <a:r>
+              <a:rPr sz="850" b="0" i="0">
+                <a:solidFill>
+                  <a:srgbClr val="1B1B26"/>
+                </a:solidFill>
+                <a:latin typeface="Yu Gothic"/>
+                <a:ea typeface="Yu Gothic"/>
+                <a:cs typeface="Yu Gothic"/>
+              </a:rPr>
+              <a:t>・議事録・宿題起票（坪井）</a:t>
+            </a:r>
+          </a:p>
+        </p:txBody>
+      </p:sp>
+      <p:sp>
+        <p:nvSpPr>
+          <p:cNvPr id="14" name="Rectangle 13"/>
+          <p:cNvSpPr/>
+          <p:nvPr/>
+        </p:nvSpPr>
+        <p:spPr>
+          <a:xfrm>
+            <a:off x="5020055" y="1993392"/>
+            <a:ext cx="2176272" cy="457200"/>
+          </a:xfrm>
+          <a:prstGeom prst="rect">
+            <a:avLst/>
+          </a:prstGeom>
+          <a:solidFill>
+            <a:srgbClr val="2563EB"/>
+          </a:solidFill>
+          <a:ln>
+            <a:noFill/>
+          </a:ln>
+          <a:effectLst/>
+        </p:spPr>
+        <p:style>
+          <a:lnRef idx="1">
+            <a:schemeClr val="accent1"/>
+          </a:lnRef>
+          <a:fillRef idx="3">
+            <a:schemeClr val="accent1"/>
+          </a:fillRef>
+          <a:effectRef idx="2">
+            <a:schemeClr val="accent1"/>
+          </a:effectRef>
+          <a:fontRef idx="minor">
+            <a:schemeClr val="lt1"/>
+          </a:fontRef>
+        </p:style>
+        <p:txBody>
+          <a:bodyPr rtlCol="0" anchor="ctr"/>
+          <a:lstStyle/>
+          <a:p>
+            <a:pPr algn="ctr"/>
+          </a:p>
+        </p:txBody>
+      </p:sp>
+      <p:sp>
+        <p:nvSpPr>
+          <p:cNvPr id="15" name="TextBox 14"/>
+          <p:cNvSpPr txBox="1"/>
+          <p:nvPr/>
+        </p:nvSpPr>
+        <p:spPr>
+          <a:xfrm>
+            <a:off x="5020055" y="2020824"/>
+            <a:ext cx="2176272" cy="402336"/>
+          </a:xfrm>
+          <a:prstGeom prst="rect">
+            <a:avLst/>
+          </a:prstGeom>
+          <a:noFill/>
+        </p:spPr>
+        <p:txBody>
+          <a:bodyPr wrap="square" lIns="0" rIns="0" tIns="0" bIns="0" anchor="ctr">
+            <a:spAutoFit/>
+          </a:bodyPr>
+          <a:lstStyle/>
+          <a:p>
+            <a:pPr algn="ctr">
+              <a:spcAft>
+                <a:spcPts val="0"/>
+              </a:spcAft>
+            </a:pPr>
+            <a:r>
+              <a:rPr sz="1500" b="1" i="0">
+                <a:solidFill>
+                  <a:srgbClr val="FFFFFF"/>
+                </a:solidFill>
+                <a:latin typeface="Yu Gothic"/>
+                <a:ea typeface="Yu Gothic"/>
+                <a:cs typeface="Yu Gothic"/>
+              </a:rPr>
+              <a:t>水</a:t>
+            </a:r>
+            <a:r>
+              <a:rPr sz="850" b="0" i="0">
+                <a:solidFill>
+                  <a:srgbClr val="BFD4FE"/>
+                </a:solidFill>
+                <a:latin typeface="Yu Gothic"/>
+                <a:ea typeface="Yu Gothic"/>
+                <a:cs typeface="Yu Gothic"/>
+              </a:rPr>
+              <a:t>  WED</a:t>
+            </a:r>
+          </a:p>
+        </p:txBody>
+      </p:sp>
+      <p:sp>
+        <p:nvSpPr>
+          <p:cNvPr id="16" name="Rectangle 15"/>
+          <p:cNvSpPr/>
+          <p:nvPr/>
+        </p:nvSpPr>
+        <p:spPr>
+          <a:xfrm>
+            <a:off x="5020055" y="2450592"/>
+            <a:ext cx="2176272" cy="2542032"/>
+          </a:xfrm>
+          <a:prstGeom prst="rect">
+            <a:avLst/>
+          </a:prstGeom>
+          <a:solidFill>
+            <a:srgbClr val="FFFFFF"/>
+          </a:solidFill>
+          <a:ln w="9525">
+            <a:solidFill>
+              <a:srgbClr val="E5E7EB"/>
+            </a:solidFill>
+          </a:ln>
+          <a:effectLst/>
+        </p:spPr>
+        <p:style>
+          <a:lnRef idx="1">
+            <a:schemeClr val="accent1"/>
+          </a:lnRef>
+          <a:fillRef idx="3">
+            <a:schemeClr val="accent1"/>
+          </a:fillRef>
+          <a:effectRef idx="2">
+            <a:schemeClr val="accent1"/>
+          </a:effectRef>
+          <a:fontRef idx="minor">
+            <a:schemeClr val="lt1"/>
+          </a:fontRef>
+        </p:style>
+        <p:txBody>
+          <a:bodyPr rtlCol="0" anchor="ctr"/>
+          <a:lstStyle/>
+          <a:p>
+            <a:pPr algn="ctr"/>
+          </a:p>
+        </p:txBody>
+      </p:sp>
+      <p:sp>
+        <p:nvSpPr>
+          <p:cNvPr id="17" name="TextBox 16"/>
+          <p:cNvSpPr txBox="1"/>
+          <p:nvPr/>
+        </p:nvSpPr>
+        <p:spPr>
+          <a:xfrm>
+            <a:off x="5148071" y="2560320"/>
+            <a:ext cx="1938528" cy="2340864"/>
+          </a:xfrm>
+          <a:prstGeom prst="rect">
+            <a:avLst/>
+          </a:prstGeom>
+          <a:noFill/>
+        </p:spPr>
+        <p:txBody>
+          <a:bodyPr wrap="square" lIns="0" rIns="0" tIns="0" bIns="0">
+            <a:spAutoFit/>
+          </a:bodyPr>
+          <a:lstStyle/>
+          <a:p>
+            <a:pPr algn="l">
+              <a:spcAft>
+                <a:spcPts val="300"/>
+              </a:spcAft>
+            </a:pPr>
+            <a:r>
+              <a:rPr sz="950" b="1" i="0">
+                <a:solidFill>
+                  <a:srgbClr val="1E40AF"/>
+                </a:solidFill>
+                <a:latin typeface="Yu Gothic"/>
+                <a:ea typeface="Yu Gothic"/>
+                <a:cs typeface="Yu Gothic"/>
+              </a:rPr>
+              <a:t>データ処理集中日</a:t>
+            </a:r>
+          </a:p>
+          <a:p>
+            <a:pPr algn="l">
+              <a:spcAft>
+                <a:spcPts val="300"/>
+              </a:spcAft>
+            </a:pPr>
+            <a:r>
+              <a:rPr sz="850" b="0" i="0">
+                <a:solidFill>
+                  <a:srgbClr val="1B1B26"/>
+                </a:solidFill>
+                <a:latin typeface="Yu Gothic"/>
+                <a:ea typeface="Yu Gothic"/>
+                <a:cs typeface="Yu Gothic"/>
+              </a:rPr>
+              <a:t>・財務流し込み・名寄せ</a:t>
+            </a:r>
+          </a:p>
+          <a:p>
+            <a:pPr algn="l">
+              <a:spcAft>
+                <a:spcPts val="300"/>
+              </a:spcAft>
+            </a:pPr>
+            <a:r>
+              <a:rPr sz="850" b="0" i="0">
+                <a:solidFill>
+                  <a:srgbClr val="1B1B26"/>
+                </a:solidFill>
+                <a:latin typeface="Yu Gothic"/>
+                <a:ea typeface="Yu Gothic"/>
+                <a:cs typeface="Yu Gothic"/>
+              </a:rPr>
+              <a:t>・スコア集計（坪井）</a:t>
+            </a:r>
+          </a:p>
+          <a:p>
+            <a:pPr algn="l">
+              <a:spcAft>
+                <a:spcPts val="300"/>
+              </a:spcAft>
+            </a:pPr>
+            <a:r>
+              <a:rPr sz="950" b="1" i="0">
+                <a:solidFill>
+                  <a:srgbClr val="1E40AF"/>
+                </a:solidFill>
+                <a:latin typeface="Yu Gothic"/>
+                <a:ea typeface="Yu Gothic"/>
+                <a:cs typeface="Yu Gothic"/>
+              </a:rPr>
+              <a:t>宿題の中間督促</a:t>
+            </a:r>
+          </a:p>
+          <a:p>
+            <a:pPr algn="l">
+              <a:spcAft>
+                <a:spcPts val="300"/>
+              </a:spcAft>
+            </a:pPr>
+            <a:r>
+              <a:rPr sz="850" b="0" i="0">
+                <a:solidFill>
+                  <a:srgbClr val="1B1B26"/>
+                </a:solidFill>
+                <a:latin typeface="Yu Gothic"/>
+                <a:ea typeface="Yu Gothic"/>
+                <a:cs typeface="Yu Gothic"/>
+              </a:rPr>
+              <a:t>・停滞の芽を朝10分で点検</a:t>
+            </a:r>
+          </a:p>
+        </p:txBody>
+      </p:sp>
+      <p:sp>
+        <p:nvSpPr>
+          <p:cNvPr id="18" name="Rectangle 17"/>
+          <p:cNvSpPr/>
+          <p:nvPr/>
+        </p:nvSpPr>
+        <p:spPr>
+          <a:xfrm>
+            <a:off x="7278623" y="1993392"/>
+            <a:ext cx="2176272" cy="457200"/>
+          </a:xfrm>
+          <a:prstGeom prst="rect">
+            <a:avLst/>
+          </a:prstGeom>
+          <a:solidFill>
+            <a:srgbClr val="2563EB"/>
+          </a:solidFill>
+          <a:ln>
+            <a:noFill/>
+          </a:ln>
+          <a:effectLst/>
+        </p:spPr>
+        <p:style>
+          <a:lnRef idx="1">
+            <a:schemeClr val="accent1"/>
+          </a:lnRef>
+          <a:fillRef idx="3">
+            <a:schemeClr val="accent1"/>
+          </a:fillRef>
+          <a:effectRef idx="2">
+            <a:schemeClr val="accent1"/>
+          </a:effectRef>
+          <a:fontRef idx="minor">
+            <a:schemeClr val="lt1"/>
+          </a:fontRef>
+        </p:style>
+        <p:txBody>
+          <a:bodyPr rtlCol="0" anchor="ctr"/>
+          <a:lstStyle/>
+          <a:p>
+            <a:pPr algn="ctr"/>
+          </a:p>
+        </p:txBody>
+      </p:sp>
+      <p:sp>
+        <p:nvSpPr>
+          <p:cNvPr id="19" name="TextBox 18"/>
+          <p:cNvSpPr txBox="1"/>
+          <p:nvPr/>
+        </p:nvSpPr>
+        <p:spPr>
+          <a:xfrm>
+            <a:off x="7278623" y="2020824"/>
+            <a:ext cx="2176272" cy="402336"/>
+          </a:xfrm>
+          <a:prstGeom prst="rect">
+            <a:avLst/>
+          </a:prstGeom>
+          <a:noFill/>
+        </p:spPr>
+        <p:txBody>
+          <a:bodyPr wrap="square" lIns="0" rIns="0" tIns="0" bIns="0" anchor="ctr">
+            <a:spAutoFit/>
+          </a:bodyPr>
+          <a:lstStyle/>
+          <a:p>
+            <a:pPr algn="ctr">
+              <a:spcAft>
+                <a:spcPts val="0"/>
+              </a:spcAft>
+            </a:pPr>
+            <a:r>
+              <a:rPr sz="1500" b="1" i="0">
+                <a:solidFill>
+                  <a:srgbClr val="FFFFFF"/>
+                </a:solidFill>
+                <a:latin typeface="Yu Gothic"/>
+                <a:ea typeface="Yu Gothic"/>
+                <a:cs typeface="Yu Gothic"/>
+              </a:rPr>
+              <a:t>木</a:t>
+            </a:r>
+            <a:r>
+              <a:rPr sz="850" b="0" i="0">
+                <a:solidFill>
+                  <a:srgbClr val="BFD4FE"/>
+                </a:solidFill>
+                <a:latin typeface="Yu Gothic"/>
+                <a:ea typeface="Yu Gothic"/>
+                <a:cs typeface="Yu Gothic"/>
+              </a:rPr>
+              <a:t>  THU</a:t>
+            </a:r>
+          </a:p>
+        </p:txBody>
+      </p:sp>
+      <p:sp>
+        <p:nvSpPr>
+          <p:cNvPr id="20" name="Rectangle 19"/>
+          <p:cNvSpPr/>
+          <p:nvPr/>
+        </p:nvSpPr>
+        <p:spPr>
+          <a:xfrm>
+            <a:off x="7278623" y="2450592"/>
+            <a:ext cx="2176272" cy="2542032"/>
+          </a:xfrm>
+          <a:prstGeom prst="rect">
+            <a:avLst/>
+          </a:prstGeom>
+          <a:solidFill>
+            <a:srgbClr val="FFFFFF"/>
+          </a:solidFill>
+          <a:ln w="9525">
+            <a:solidFill>
+              <a:srgbClr val="E5E7EB"/>
+            </a:solidFill>
+          </a:ln>
+          <a:effectLst/>
+        </p:spPr>
+        <p:style>
+          <a:lnRef idx="1">
+            <a:schemeClr val="accent1"/>
+          </a:lnRef>
+          <a:fillRef idx="3">
+            <a:schemeClr val="accent1"/>
+          </a:fillRef>
+          <a:effectRef idx="2">
+            <a:schemeClr val="accent1"/>
+          </a:effectRef>
+          <a:fontRef idx="minor">
+            <a:schemeClr val="lt1"/>
+          </a:fontRef>
+        </p:style>
+        <p:txBody>
+          <a:bodyPr rtlCol="0" anchor="ctr"/>
+          <a:lstStyle/>
+          <a:p>
+            <a:pPr algn="ctr"/>
+          </a:p>
+        </p:txBody>
+      </p:sp>
+      <p:sp>
+        <p:nvSpPr>
+          <p:cNvPr id="21" name="TextBox 20"/>
+          <p:cNvSpPr txBox="1"/>
+          <p:nvPr/>
+        </p:nvSpPr>
+        <p:spPr>
+          <a:xfrm>
+            <a:off x="7406639" y="2560320"/>
+            <a:ext cx="1938528" cy="2340864"/>
+          </a:xfrm>
+          <a:prstGeom prst="rect">
+            <a:avLst/>
+          </a:prstGeom>
+          <a:noFill/>
+        </p:spPr>
+        <p:txBody>
+          <a:bodyPr wrap="square" lIns="0" rIns="0" tIns="0" bIns="0">
+            <a:spAutoFit/>
+          </a:bodyPr>
+          <a:lstStyle/>
+          <a:p>
+            <a:pPr algn="l">
+              <a:spcAft>
+                <a:spcPts val="300"/>
+              </a:spcAft>
+            </a:pPr>
+            <a:r>
+              <a:rPr sz="950" b="1" i="0">
+                <a:solidFill>
+                  <a:srgbClr val="1E40AF"/>
+                </a:solidFill>
+                <a:latin typeface="Yu Gothic"/>
+                <a:ea typeface="Yu Gothic"/>
+                <a:cs typeface="Yu Gothic"/>
+              </a:rPr>
+              <a:t>戦略会議（隔週）</a:t>
+            </a:r>
+          </a:p>
+          <a:p>
+            <a:pPr algn="l">
+              <a:spcAft>
+                <a:spcPts val="300"/>
+              </a:spcAft>
+            </a:pPr>
+            <a:r>
+              <a:rPr sz="850" b="0" i="0">
+                <a:solidFill>
+                  <a:srgbClr val="1B1B26"/>
+                </a:solidFill>
+                <a:latin typeface="Yu Gothic"/>
+                <a:ea typeface="Yu Gothic"/>
+                <a:cs typeface="Yu Gothic"/>
+              </a:rPr>
+              <a:t>・分科会論点を意思決定</a:t>
+            </a:r>
+          </a:p>
+          <a:p>
+            <a:pPr algn="l">
+              <a:spcAft>
+                <a:spcPts val="300"/>
+              </a:spcAft>
+            </a:pPr>
+            <a:r>
+              <a:rPr sz="950" b="1" i="0">
+                <a:solidFill>
+                  <a:srgbClr val="1E40AF"/>
+                </a:solidFill>
+                <a:latin typeface="Yu Gothic"/>
+                <a:ea typeface="Yu Gothic"/>
+                <a:cs typeface="Yu Gothic"/>
+              </a:rPr>
+              <a:t>前日=水夕に事前確認</a:t>
+            </a:r>
+          </a:p>
+          <a:p>
+            <a:pPr algn="l">
+              <a:spcAft>
+                <a:spcPts val="300"/>
+              </a:spcAft>
+            </a:pPr>
+            <a:r>
+              <a:rPr sz="850" b="0" i="0">
+                <a:solidFill>
+                  <a:srgbClr val="1B1B26"/>
+                </a:solidFill>
+                <a:latin typeface="Yu Gothic"/>
+                <a:ea typeface="Yu Gothic"/>
+                <a:cs typeface="Yu Gothic"/>
+              </a:rPr>
+              <a:t>・新谷のアジェンダ確認30分</a:t>
+            </a:r>
+          </a:p>
+          <a:p>
+            <a:pPr algn="l">
+              <a:spcAft>
+                <a:spcPts val="300"/>
+              </a:spcAft>
+            </a:pPr>
+            <a:r>
+              <a:rPr sz="850" b="0" i="0">
+                <a:solidFill>
+                  <a:srgbClr val="1B1B26"/>
+                </a:solidFill>
+                <a:latin typeface="Yu Gothic"/>
+                <a:ea typeface="Yu Gothic"/>
+                <a:cs typeface="Yu Gothic"/>
+              </a:rPr>
+              <a:t>・点検会議キーチャート仕上げ</a:t>
+            </a:r>
+          </a:p>
+        </p:txBody>
+      </p:sp>
+      <p:sp>
+        <p:nvSpPr>
+          <p:cNvPr id="22" name="Rectangle 21"/>
+          <p:cNvSpPr/>
+          <p:nvPr/>
+        </p:nvSpPr>
+        <p:spPr>
+          <a:xfrm>
+            <a:off x="9537192" y="1993392"/>
+            <a:ext cx="2176272" cy="457200"/>
+          </a:xfrm>
+          <a:prstGeom prst="rect">
+            <a:avLst/>
+          </a:prstGeom>
+          <a:solidFill>
+            <a:srgbClr val="2563EB"/>
+          </a:solidFill>
+          <a:ln>
+            <a:noFill/>
+          </a:ln>
+          <a:effectLst/>
+        </p:spPr>
+        <p:style>
+          <a:lnRef idx="1">
+            <a:schemeClr val="accent1"/>
+          </a:lnRef>
+          <a:fillRef idx="3">
+            <a:schemeClr val="accent1"/>
+          </a:fillRef>
+          <a:effectRef idx="2">
+            <a:schemeClr val="accent1"/>
+          </a:effectRef>
+          <a:fontRef idx="minor">
+            <a:schemeClr val="lt1"/>
+          </a:fontRef>
+        </p:style>
+        <p:txBody>
+          <a:bodyPr rtlCol="0" anchor="ctr"/>
+          <a:lstStyle/>
+          <a:p>
+            <a:pPr algn="ctr"/>
+          </a:p>
+        </p:txBody>
+      </p:sp>
+      <p:sp>
+        <p:nvSpPr>
+          <p:cNvPr id="23" name="TextBox 22"/>
+          <p:cNvSpPr txBox="1"/>
+          <p:nvPr/>
+        </p:nvSpPr>
+        <p:spPr>
+          <a:xfrm>
+            <a:off x="9537192" y="2020824"/>
+            <a:ext cx="2176272" cy="402336"/>
+          </a:xfrm>
+          <a:prstGeom prst="rect">
+            <a:avLst/>
+          </a:prstGeom>
+          <a:noFill/>
+        </p:spPr>
+        <p:txBody>
+          <a:bodyPr wrap="square" lIns="0" rIns="0" tIns="0" bIns="0" anchor="ctr">
+            <a:spAutoFit/>
+          </a:bodyPr>
+          <a:lstStyle/>
+          <a:p>
+            <a:pPr algn="ctr">
+              <a:spcAft>
+                <a:spcPts val="0"/>
+              </a:spcAft>
+            </a:pPr>
+            <a:r>
+              <a:rPr sz="1500" b="1" i="0">
+                <a:solidFill>
+                  <a:srgbClr val="FFFFFF"/>
+                </a:solidFill>
+                <a:latin typeface="Yu Gothic"/>
+                <a:ea typeface="Yu Gothic"/>
+                <a:cs typeface="Yu Gothic"/>
+              </a:rPr>
+              <a:t>金</a:t>
+            </a:r>
+            <a:r>
+              <a:rPr sz="850" b="0" i="0">
+                <a:solidFill>
+                  <a:srgbClr val="BFD4FE"/>
+                </a:solidFill>
+                <a:latin typeface="Yu Gothic"/>
+                <a:ea typeface="Yu Gothic"/>
+                <a:cs typeface="Yu Gothic"/>
+              </a:rPr>
+              <a:t>  FRI</a:t>
+            </a:r>
+          </a:p>
+        </p:txBody>
+      </p:sp>
+      <p:sp>
+        <p:nvSpPr>
+          <p:cNvPr id="24" name="Rectangle 23"/>
+          <p:cNvSpPr/>
+          <p:nvPr/>
+        </p:nvSpPr>
+        <p:spPr>
+          <a:xfrm>
+            <a:off x="9537192" y="2450592"/>
+            <a:ext cx="2176272" cy="2542032"/>
+          </a:xfrm>
+          <a:prstGeom prst="rect">
+            <a:avLst/>
+          </a:prstGeom>
+          <a:solidFill>
+            <a:srgbClr val="FFFFFF"/>
+          </a:solidFill>
+          <a:ln w="9525">
+            <a:solidFill>
+              <a:srgbClr val="E5E7EB"/>
+            </a:solidFill>
+          </a:ln>
+          <a:effectLst/>
+        </p:spPr>
+        <p:style>
+          <a:lnRef idx="1">
+            <a:schemeClr val="accent1"/>
+          </a:lnRef>
+          <a:fillRef idx="3">
+            <a:schemeClr val="accent1"/>
+          </a:fillRef>
+          <a:effectRef idx="2">
+            <a:schemeClr val="accent1"/>
+          </a:effectRef>
+          <a:fontRef idx="minor">
+            <a:schemeClr val="lt1"/>
+          </a:fontRef>
+        </p:style>
+        <p:txBody>
+          <a:bodyPr rtlCol="0" anchor="ctr"/>
+          <a:lstStyle/>
+          <a:p>
+            <a:pPr algn="ctr"/>
+          </a:p>
+        </p:txBody>
+      </p:sp>
+      <p:sp>
+        <p:nvSpPr>
+          <p:cNvPr id="25" name="TextBox 24"/>
+          <p:cNvSpPr txBox="1"/>
+          <p:nvPr/>
+        </p:nvSpPr>
+        <p:spPr>
+          <a:xfrm>
+            <a:off x="9665208" y="2560320"/>
+            <a:ext cx="1938528" cy="2340864"/>
+          </a:xfrm>
+          <a:prstGeom prst="rect">
+            <a:avLst/>
+          </a:prstGeom>
+          <a:noFill/>
+        </p:spPr>
+        <p:txBody>
+          <a:bodyPr wrap="square" lIns="0" rIns="0" tIns="0" bIns="0">
+            <a:spAutoFit/>
+          </a:bodyPr>
+          <a:lstStyle/>
+          <a:p>
+            <a:pPr algn="l">
+              <a:spcAft>
+                <a:spcPts val="300"/>
+              </a:spcAft>
+            </a:pPr>
+            <a:r>
+              <a:rPr sz="950" b="1" i="0">
+                <a:solidFill>
+                  <a:srgbClr val="1E40AF"/>
+                </a:solidFill>
+                <a:latin typeface="Yu Gothic"/>
+                <a:ea typeface="Yu Gothic"/>
+                <a:cs typeface="Yu Gothic"/>
+              </a:rPr>
+              <a:t>17:00 週次レビュー30分</a:t>
+            </a:r>
+          </a:p>
+          <a:p>
+            <a:pPr algn="l">
+              <a:spcAft>
+                <a:spcPts val="300"/>
+              </a:spcAft>
+            </a:pPr>
+            <a:r>
+              <a:rPr sz="850" b="0" i="0">
+                <a:solidFill>
+                  <a:srgbClr val="1B1B26"/>
+                </a:solidFill>
+                <a:latin typeface="Yu Gothic"/>
+                <a:ea typeface="Yu Gothic"/>
+                <a:cs typeface="Yu Gothic"/>
+              </a:rPr>
+              <a:t>（新谷・小沢・坪井）</a:t>
+            </a:r>
+          </a:p>
+          <a:p>
+            <a:pPr algn="l">
+              <a:spcAft>
+                <a:spcPts val="300"/>
+              </a:spcAft>
+            </a:pPr>
+            <a:r>
+              <a:rPr sz="850" b="0" i="0">
+                <a:solidFill>
+                  <a:srgbClr val="1B1B26"/>
+                </a:solidFill>
+                <a:latin typeface="Yu Gothic"/>
+                <a:ea typeface="Yu Gothic"/>
+                <a:cs typeface="Yu Gothic"/>
+              </a:rPr>
+              <a:t>・キュー残／データ鮮度</a:t>
+            </a:r>
+          </a:p>
+          <a:p>
+            <a:pPr algn="l">
+              <a:spcAft>
+                <a:spcPts val="300"/>
+              </a:spcAft>
+            </a:pPr>
+            <a:r>
+              <a:rPr sz="850" b="0" i="0">
+                <a:solidFill>
+                  <a:srgbClr val="1B1B26"/>
+                </a:solidFill>
+                <a:latin typeface="Yu Gothic"/>
+                <a:ea typeface="Yu Gothic"/>
+                <a:cs typeface="Yu Gothic"/>
+              </a:rPr>
+              <a:t>・宿題消化率／来週の論点</a:t>
+            </a:r>
+          </a:p>
+          <a:p>
+            <a:pPr algn="l">
+              <a:spcAft>
+                <a:spcPts val="300"/>
+              </a:spcAft>
+            </a:pPr>
+            <a:r>
+              <a:rPr sz="850" b="0" i="0">
+                <a:solidFill>
+                  <a:srgbClr val="1B1B26"/>
+                </a:solidFill>
+                <a:latin typeface="Yu Gothic"/>
+                <a:ea typeface="Yu Gothic"/>
+                <a:cs typeface="Yu Gothic"/>
+              </a:rPr>
+              <a:t>・エスカレーション確認</a:t>
+            </a:r>
+          </a:p>
+        </p:txBody>
+      </p:sp>
+      <p:sp>
+        <p:nvSpPr>
+          <p:cNvPr id="26" name="Rectangle 25"/>
+          <p:cNvSpPr/>
+          <p:nvPr/>
+        </p:nvSpPr>
+        <p:spPr>
+          <a:xfrm>
+            <a:off x="502920" y="5230368"/>
+            <a:ext cx="5504688" cy="1078992"/>
+          </a:xfrm>
+          <a:prstGeom prst="rect">
+            <a:avLst/>
+          </a:prstGeom>
+          <a:solidFill>
+            <a:srgbClr val="EAF1FE"/>
+          </a:solidFill>
+          <a:ln>
+            <a:noFill/>
+          </a:ln>
+          <a:effectLst/>
+        </p:spPr>
+        <p:style>
+          <a:lnRef idx="1">
+            <a:schemeClr val="accent1"/>
+          </a:lnRef>
+          <a:fillRef idx="3">
+            <a:schemeClr val="accent1"/>
+          </a:fillRef>
+          <a:effectRef idx="2">
+            <a:schemeClr val="accent1"/>
+          </a:effectRef>
+          <a:fontRef idx="minor">
+            <a:schemeClr val="lt1"/>
+          </a:fontRef>
+        </p:style>
+        <p:txBody>
+          <a:bodyPr rtlCol="0" anchor="ctr"/>
+          <a:lstStyle/>
+          <a:p>
+            <a:pPr algn="ctr"/>
+          </a:p>
+        </p:txBody>
+      </p:sp>
+      <p:sp>
+        <p:nvSpPr>
+          <p:cNvPr id="27" name="Rectangle 26"/>
+          <p:cNvSpPr/>
+          <p:nvPr/>
+        </p:nvSpPr>
+        <p:spPr>
+          <a:xfrm>
+            <a:off x="502920" y="5230368"/>
+            <a:ext cx="38100" cy="1078992"/>
+          </a:xfrm>
+          <a:prstGeom prst="rect">
+            <a:avLst/>
+          </a:prstGeom>
+          <a:solidFill>
+            <a:srgbClr val="2563EB"/>
+          </a:solidFill>
+          <a:ln>
+            <a:noFill/>
+          </a:ln>
+          <a:effectLst/>
+        </p:spPr>
+        <p:style>
+          <a:lnRef idx="1">
+            <a:schemeClr val="accent1"/>
+          </a:lnRef>
+          <a:fillRef idx="3">
+            <a:schemeClr val="accent1"/>
+          </a:fillRef>
+          <a:effectRef idx="2">
+            <a:schemeClr val="accent1"/>
+          </a:effectRef>
+          <a:fontRef idx="minor">
+            <a:schemeClr val="lt1"/>
+          </a:fontRef>
+        </p:style>
+        <p:txBody>
+          <a:bodyPr rtlCol="0" anchor="ctr"/>
+          <a:lstStyle/>
+          <a:p>
+            <a:pPr algn="ctr"/>
+          </a:p>
+        </p:txBody>
+      </p:sp>
+      <p:sp>
+        <p:nvSpPr>
+          <p:cNvPr id="28" name="TextBox 27"/>
+          <p:cNvSpPr txBox="1"/>
+          <p:nvPr/>
+        </p:nvSpPr>
+        <p:spPr>
+          <a:xfrm>
+            <a:off x="685800" y="5340096"/>
+            <a:ext cx="5175504" cy="896112"/>
+          </a:xfrm>
+          <a:prstGeom prst="rect">
+            <a:avLst/>
+          </a:prstGeom>
+          <a:noFill/>
+        </p:spPr>
+        <p:txBody>
+          <a:bodyPr wrap="square" lIns="0" rIns="0" tIns="0" bIns="0">
+            <a:spAutoFit/>
+          </a:bodyPr>
+          <a:lstStyle/>
+          <a:p>
+            <a:pPr algn="l">
+              <a:spcAft>
+                <a:spcPts val="300"/>
+              </a:spcAft>
+            </a:pPr>
+            <a:r>
+              <a:rPr sz="1100" b="1" i="0">
+                <a:solidFill>
+                  <a:srgbClr val="1E40AF"/>
+                </a:solidFill>
+                <a:latin typeface="Yu Gothic"/>
+                <a:ea typeface="Yu Gothic"/>
+                <a:cs typeface="Yu Gothic"/>
+              </a:rPr>
+              <a:t>エスカレーション</a:t>
+            </a:r>
+          </a:p>
+          <a:p>
+            <a:pPr algn="l">
+              <a:spcAft>
+                <a:spcPts val="200"/>
+              </a:spcAft>
+            </a:pPr>
+            <a:r>
+              <a:rPr sz="950" b="0" i="0">
+                <a:solidFill>
+                  <a:srgbClr val="1B1B26"/>
+                </a:solidFill>
+                <a:latin typeface="Yu Gothic"/>
+                <a:ea typeface="Yu Gothic"/>
+                <a:cs typeface="Yu Gothic"/>
+              </a:rPr>
+              <a:t>24時間で解けないものは抱えずに上へ。滞留こそ失点。</a:t>
+            </a:r>
+          </a:p>
           <a:p>
             <a:pPr algn="l">
               <a:spcAft>
@@ -4855,35 +6402,81 @@
               </a:spcAft>
             </a:pPr>
             <a:r>
-              <a:rPr sz="1900" b="1" i="0">
-                <a:solidFill>
-                  <a:srgbClr val="262630"/>
-                </a:solidFill>
-                <a:latin typeface="Yu Gothic"/>
-                <a:ea typeface="Yu Gothic"/>
-                <a:cs typeface="Yu Gothic"/>
-              </a:rPr>
-              <a:t>STOの週次運用リズム</a:t>
-            </a:r>
-          </a:p>
-        </p:txBody>
-      </p:sp>
-      <p:sp>
-        <p:nvSpPr>
-          <p:cNvPr id="4" name="Rectangle 3"/>
+              <a:rPr sz="950" b="1" i="0">
+                <a:solidFill>
+                  <a:srgbClr val="2563EB"/>
+                </a:solidFill>
+                <a:latin typeface="Yu Gothic"/>
+                <a:ea typeface="Yu Gothic"/>
+                <a:cs typeface="Yu Gothic"/>
+              </a:rPr>
+              <a:t>停滞3日で督促 → 5日で新谷へ自動エスカレーション。</a:t>
+            </a:r>
+          </a:p>
+        </p:txBody>
+      </p:sp>
+      <p:sp>
+        <p:nvSpPr>
+          <p:cNvPr id="29" name="Rectangle 28"/>
           <p:cNvSpPr/>
           <p:nvPr/>
         </p:nvSpPr>
         <p:spPr>
           <a:xfrm>
-            <a:off x="502920" y="1389888"/>
-            <a:ext cx="1463040" cy="33020"/>
+            <a:off x="6181344" y="5230368"/>
+            <a:ext cx="5504688" cy="1078992"/>
           </a:xfrm>
           <a:prstGeom prst="rect">
             <a:avLst/>
           </a:prstGeom>
           <a:solidFill>
-            <a:srgbClr val="7823DC"/>
+            <a:srgbClr val="F6F8FB"/>
+          </a:solidFill>
+          <a:ln w="9525">
+            <a:solidFill>
+              <a:srgbClr val="E5E7EB"/>
+            </a:solidFill>
+          </a:ln>
+          <a:effectLst/>
+        </p:spPr>
+        <p:style>
+          <a:lnRef idx="1">
+            <a:schemeClr val="accent1"/>
+          </a:lnRef>
+          <a:fillRef idx="3">
+            <a:schemeClr val="accent1"/>
+          </a:fillRef>
+          <a:effectRef idx="2">
+            <a:schemeClr val="accent1"/>
+          </a:effectRef>
+          <a:fontRef idx="minor">
+            <a:schemeClr val="lt1"/>
+          </a:fontRef>
+        </p:style>
+        <p:txBody>
+          <a:bodyPr rtlCol="0" anchor="ctr"/>
+          <a:lstStyle/>
+          <a:p>
+            <a:pPr algn="ctr"/>
+          </a:p>
+        </p:txBody>
+      </p:sp>
+      <p:sp>
+        <p:nvSpPr>
+          <p:cNvPr id="30" name="Rectangle 29"/>
+          <p:cNvSpPr/>
+          <p:nvPr/>
+        </p:nvSpPr>
+        <p:spPr>
+          <a:xfrm>
+            <a:off x="6181344" y="5230368"/>
+            <a:ext cx="38100" cy="1078992"/>
+          </a:xfrm>
+          <a:prstGeom prst="rect">
+            <a:avLst/>
+          </a:prstGeom>
+          <a:solidFill>
+            <a:srgbClr val="1E40AF"/>
           </a:solidFill>
           <a:ln>
             <a:noFill/>
@@ -4914,14 +6507,135 @@
       </p:sp>
       <p:sp>
         <p:nvSpPr>
-          <p:cNvPr id="5" name="TextBox 4"/>
+          <p:cNvPr id="31" name="TextBox 30"/>
           <p:cNvSpPr txBox="1"/>
           <p:nvPr/>
         </p:nvSpPr>
         <p:spPr>
           <a:xfrm>
-            <a:off x="502920" y="1517904"/>
-            <a:ext cx="11155680" cy="310896"/>
+            <a:off x="6364224" y="5340096"/>
+            <a:ext cx="5175504" cy="896112"/>
+          </a:xfrm>
+          <a:prstGeom prst="rect">
+            <a:avLst/>
+          </a:prstGeom>
+          <a:noFill/>
+        </p:spPr>
+        <p:txBody>
+          <a:bodyPr wrap="square" lIns="0" rIns="0" tIns="0" bIns="0">
+            <a:spAutoFit/>
+          </a:bodyPr>
+          <a:lstStyle/>
+          <a:p>
+            <a:pPr algn="l">
+              <a:spcAft>
+                <a:spcPts val="300"/>
+              </a:spcAft>
+            </a:pPr>
+            <a:r>
+              <a:rPr sz="1100" b="1" i="0">
+                <a:solidFill>
+                  <a:srgbClr val="1E40AF"/>
+                </a:solidFill>
+                <a:latin typeface="Yu Gothic"/>
+                <a:ea typeface="Yu Gothic"/>
+                <a:cs typeface="Yu Gothic"/>
+              </a:rPr>
+              <a:t>STOの運転計器（金曜レビューで確認）</a:t>
+            </a:r>
+          </a:p>
+          <a:p>
+            <a:pPr algn="l">
+              <a:spcAft>
+                <a:spcPts val="200"/>
+              </a:spcAft>
+            </a:pPr>
+            <a:r>
+              <a:rPr sz="950" b="0" i="0">
+                <a:solidFill>
+                  <a:srgbClr val="1B1B26"/>
+                </a:solidFill>
+                <a:latin typeface="Yu Gothic"/>
+                <a:ea typeface="Yu Gothic"/>
+                <a:cs typeface="Yu Gothic"/>
+              </a:rPr>
+              <a:t>キュー残件数／宿題消化率／停滞5日超ゼロ</a:t>
+            </a:r>
+          </a:p>
+          <a:p>
+            <a:pPr algn="l">
+              <a:spcAft>
+                <a:spcPts val="0"/>
+              </a:spcAft>
+            </a:pPr>
+            <a:r>
+              <a:rPr sz="950" b="0" i="0">
+                <a:solidFill>
+                  <a:srgbClr val="1B1B26"/>
+                </a:solidFill>
+                <a:latin typeface="Yu Gothic"/>
+                <a:ea typeface="Yu Gothic"/>
+                <a:cs typeface="Yu Gothic"/>
+              </a:rPr>
+              <a:t>／データ鮮度（週1更新）／会議の定時運転</a:t>
+            </a:r>
+          </a:p>
+        </p:txBody>
+      </p:sp>
+      <p:sp>
+        <p:nvSpPr>
+          <p:cNvPr id="32" name="Rectangle 31"/>
+          <p:cNvSpPr/>
+          <p:nvPr/>
+        </p:nvSpPr>
+        <p:spPr>
+          <a:xfrm>
+            <a:off x="502920" y="6510528"/>
+            <a:ext cx="11183112" cy="15240"/>
+          </a:xfrm>
+          <a:prstGeom prst="rect">
+            <a:avLst/>
+          </a:prstGeom>
+          <a:solidFill>
+            <a:srgbClr val="E5E7EB"/>
+          </a:solidFill>
+          <a:ln>
+            <a:noFill/>
+          </a:ln>
+          <a:effectLst/>
+        </p:spPr>
+        <p:style>
+          <a:lnRef idx="1">
+            <a:schemeClr val="accent1"/>
+          </a:lnRef>
+          <a:fillRef idx="3">
+            <a:schemeClr val="accent1"/>
+          </a:fillRef>
+          <a:effectRef idx="2">
+            <a:schemeClr val="accent1"/>
+          </a:effectRef>
+          <a:fontRef idx="minor">
+            <a:schemeClr val="lt1"/>
+          </a:fontRef>
+        </p:style>
+        <p:txBody>
+          <a:bodyPr rtlCol="0" anchor="ctr"/>
+          <a:lstStyle/>
+          <a:p>
+            <a:pPr algn="ctr"/>
+          </a:p>
+        </p:txBody>
+      </p:sp>
+      <p:sp>
+        <p:nvSpPr>
+          <p:cNvPr id="33" name="TextBox 32"/>
+          <p:cNvSpPr txBox="1"/>
+          <p:nvPr/>
+        </p:nvSpPr>
+        <p:spPr>
+          <a:xfrm>
+            <a:off x="502920" y="6565392"/>
+            <a:ext cx="8686800" cy="274320"/>
           </a:xfrm>
           <a:prstGeom prst="rect">
             <a:avLst/>
@@ -4940,1683 +6654,9 @@
               </a:spcAft>
             </a:pPr>
             <a:r>
-              <a:rPr sz="1150" b="1" i="0">
-                <a:solidFill>
-                  <a:srgbClr val="3A106E"/>
-                </a:solidFill>
-                <a:latin typeface="Yu Gothic"/>
-                <a:ea typeface="Yu Gothic"/>
-                <a:cs typeface="Yu Gothic"/>
-              </a:rPr>
-              <a:t>毎週この型で運転する。滞留を機械的に検知し、24時間で解けない詰まりは抱えずに上へ</a:t>
-            </a:r>
-          </a:p>
-        </p:txBody>
-      </p:sp>
-      <p:sp>
-        <p:nvSpPr>
-          <p:cNvPr id="6" name="Rectangle 5"/>
-          <p:cNvSpPr/>
-          <p:nvPr/>
-        </p:nvSpPr>
-        <p:spPr>
-          <a:xfrm>
-            <a:off x="502920" y="1993392"/>
-            <a:ext cx="2176272" cy="457200"/>
-          </a:xfrm>
-          <a:prstGeom prst="rect">
-            <a:avLst/>
-          </a:prstGeom>
-          <a:solidFill>
-            <a:srgbClr val="7823DC"/>
-          </a:solidFill>
-          <a:ln>
-            <a:noFill/>
-          </a:ln>
-          <a:effectLst/>
-        </p:spPr>
-        <p:style>
-          <a:lnRef idx="1">
-            <a:schemeClr val="accent1"/>
-          </a:lnRef>
-          <a:fillRef idx="3">
-            <a:schemeClr val="accent1"/>
-          </a:fillRef>
-          <a:effectRef idx="2">
-            <a:schemeClr val="accent1"/>
-          </a:effectRef>
-          <a:fontRef idx="minor">
-            <a:schemeClr val="lt1"/>
-          </a:fontRef>
-        </p:style>
-        <p:txBody>
-          <a:bodyPr rtlCol="0" anchor="ctr"/>
-          <a:lstStyle/>
-          <a:p>
-            <a:pPr algn="ctr"/>
-          </a:p>
-        </p:txBody>
-      </p:sp>
-      <p:sp>
-        <p:nvSpPr>
-          <p:cNvPr id="7" name="TextBox 6"/>
-          <p:cNvSpPr txBox="1"/>
-          <p:nvPr/>
-        </p:nvSpPr>
-        <p:spPr>
-          <a:xfrm>
-            <a:off x="502920" y="2020824"/>
-            <a:ext cx="2176272" cy="402336"/>
-          </a:xfrm>
-          <a:prstGeom prst="rect">
-            <a:avLst/>
-          </a:prstGeom>
-          <a:noFill/>
-        </p:spPr>
-        <p:txBody>
-          <a:bodyPr wrap="square" lIns="0" rIns="0" tIns="0" bIns="0" anchor="ctr">
-            <a:spAutoFit/>
-          </a:bodyPr>
-          <a:lstStyle/>
-          <a:p>
-            <a:pPr algn="ctr">
-              <a:spcAft>
-                <a:spcPts val="0"/>
-              </a:spcAft>
-            </a:pPr>
-            <a:r>
-              <a:rPr sz="1500" b="1" i="0">
-                <a:solidFill>
-                  <a:srgbClr val="FFFFFF"/>
-                </a:solidFill>
-                <a:latin typeface="Yu Gothic"/>
-                <a:ea typeface="Yu Gothic"/>
-                <a:cs typeface="Yu Gothic"/>
-              </a:rPr>
-              <a:t>月</a:t>
-            </a:r>
-            <a:r>
-              <a:rPr sz="850" b="0" i="0">
-                <a:solidFill>
-                  <a:srgbClr val="E0D2F6"/>
-                </a:solidFill>
-                <a:latin typeface="Yu Gothic"/>
-                <a:ea typeface="Yu Gothic"/>
-                <a:cs typeface="Yu Gothic"/>
-              </a:rPr>
-              <a:t>  MON</a:t>
-            </a:r>
-          </a:p>
-        </p:txBody>
-      </p:sp>
-      <p:sp>
-        <p:nvSpPr>
-          <p:cNvPr id="8" name="Rectangle 7"/>
-          <p:cNvSpPr/>
-          <p:nvPr/>
-        </p:nvSpPr>
-        <p:spPr>
-          <a:xfrm>
-            <a:off x="502920" y="2450592"/>
-            <a:ext cx="2176272" cy="2542032"/>
-          </a:xfrm>
-          <a:prstGeom prst="rect">
-            <a:avLst/>
-          </a:prstGeom>
-          <a:solidFill>
-            <a:srgbClr val="FFFFFF"/>
-          </a:solidFill>
-          <a:ln w="9525">
-            <a:solidFill>
-              <a:srgbClr val="D9D9E0"/>
-            </a:solidFill>
-          </a:ln>
-          <a:effectLst/>
-        </p:spPr>
-        <p:style>
-          <a:lnRef idx="1">
-            <a:schemeClr val="accent1"/>
-          </a:lnRef>
-          <a:fillRef idx="3">
-            <a:schemeClr val="accent1"/>
-          </a:fillRef>
-          <a:effectRef idx="2">
-            <a:schemeClr val="accent1"/>
-          </a:effectRef>
-          <a:fontRef idx="minor">
-            <a:schemeClr val="lt1"/>
-          </a:fontRef>
-        </p:style>
-        <p:txBody>
-          <a:bodyPr rtlCol="0" anchor="ctr"/>
-          <a:lstStyle/>
-          <a:p>
-            <a:pPr algn="ctr"/>
-          </a:p>
-        </p:txBody>
-      </p:sp>
-      <p:sp>
-        <p:nvSpPr>
-          <p:cNvPr id="9" name="TextBox 8"/>
-          <p:cNvSpPr txBox="1"/>
-          <p:nvPr/>
-        </p:nvSpPr>
-        <p:spPr>
-          <a:xfrm>
-            <a:off x="630936" y="2560320"/>
-            <a:ext cx="1938528" cy="2340864"/>
-          </a:xfrm>
-          <a:prstGeom prst="rect">
-            <a:avLst/>
-          </a:prstGeom>
-          <a:noFill/>
-        </p:spPr>
-        <p:txBody>
-          <a:bodyPr wrap="square" lIns="0" rIns="0" tIns="0" bIns="0">
-            <a:spAutoFit/>
-          </a:bodyPr>
-          <a:lstStyle/>
-          <a:p>
-            <a:pPr algn="l">
-              <a:spcAft>
-                <a:spcPts val="300"/>
-              </a:spcAft>
-            </a:pPr>
-            <a:r>
-              <a:rPr sz="950" b="1" i="0">
-                <a:solidFill>
-                  <a:srgbClr val="3A106E"/>
-                </a:solidFill>
-                <a:latin typeface="Yu Gothic"/>
-                <a:ea typeface="Yu Gothic"/>
-                <a:cs typeface="Yu Gothic"/>
-              </a:rPr>
-              <a:t>スケジュール確定</a:t>
-            </a:r>
-          </a:p>
-          <a:p>
-            <a:pPr algn="l">
-              <a:spcAft>
-                <a:spcPts val="300"/>
-              </a:spcAft>
-            </a:pPr>
-            <a:r>
-              <a:rPr sz="850" b="0" i="0">
-                <a:solidFill>
-                  <a:srgbClr val="262630"/>
-                </a:solidFill>
-                <a:latin typeface="Yu Gothic"/>
-                <a:ea typeface="Yu Gothic"/>
-                <a:cs typeface="Yu Gothic"/>
-              </a:rPr>
-              <a:t>・今週の会議体日程を確定</a:t>
-            </a:r>
-          </a:p>
-          <a:p>
-            <a:pPr algn="l">
-              <a:spcAft>
-                <a:spcPts val="300"/>
-              </a:spcAft>
-            </a:pPr>
-            <a:r>
-              <a:rPr sz="850" b="0" i="0">
-                <a:solidFill>
-                  <a:srgbClr val="262630"/>
-                </a:solidFill>
-                <a:latin typeface="Yu Gothic"/>
-                <a:ea typeface="Yu Gothic"/>
-                <a:cs typeface="Yu Gothic"/>
-              </a:rPr>
-              <a:t>・アジェンダドラフト配布</a:t>
-            </a:r>
-          </a:p>
-          <a:p>
-            <a:pPr algn="l">
-              <a:spcAft>
-                <a:spcPts val="300"/>
-              </a:spcAft>
-            </a:pPr>
-            <a:r>
-              <a:rPr sz="950" b="1" i="0">
-                <a:solidFill>
-                  <a:srgbClr val="3A106E"/>
-                </a:solidFill>
-                <a:latin typeface="Yu Gothic"/>
-                <a:ea typeface="Yu Gothic"/>
-                <a:cs typeface="Yu Gothic"/>
-              </a:rPr>
-              <a:t>マスター週次更新</a:t>
-            </a:r>
-          </a:p>
-          <a:p>
-            <a:pPr algn="l">
-              <a:spcAft>
-                <a:spcPts val="300"/>
-              </a:spcAft>
-            </a:pPr>
-            <a:r>
-              <a:rPr sz="850" b="0" i="0">
-                <a:solidFill>
-                  <a:srgbClr val="262630"/>
-                </a:solidFill>
-                <a:latin typeface="Yu Gothic"/>
-                <a:ea typeface="Yu Gothic"/>
-                <a:cs typeface="Yu Gothic"/>
-              </a:rPr>
-              <a:t>・キュー処理・データ反映</a:t>
-            </a:r>
-          </a:p>
-        </p:txBody>
-      </p:sp>
-      <p:sp>
-        <p:nvSpPr>
-          <p:cNvPr id="10" name="Rectangle 9"/>
-          <p:cNvSpPr/>
-          <p:nvPr/>
-        </p:nvSpPr>
-        <p:spPr>
-          <a:xfrm>
-            <a:off x="2761487" y="1993392"/>
-            <a:ext cx="2176272" cy="457200"/>
-          </a:xfrm>
-          <a:prstGeom prst="rect">
-            <a:avLst/>
-          </a:prstGeom>
-          <a:solidFill>
-            <a:srgbClr val="7823DC"/>
-          </a:solidFill>
-          <a:ln>
-            <a:noFill/>
-          </a:ln>
-          <a:effectLst/>
-        </p:spPr>
-        <p:style>
-          <a:lnRef idx="1">
-            <a:schemeClr val="accent1"/>
-          </a:lnRef>
-          <a:fillRef idx="3">
-            <a:schemeClr val="accent1"/>
-          </a:fillRef>
-          <a:effectRef idx="2">
-            <a:schemeClr val="accent1"/>
-          </a:effectRef>
-          <a:fontRef idx="minor">
-            <a:schemeClr val="lt1"/>
-          </a:fontRef>
-        </p:style>
-        <p:txBody>
-          <a:bodyPr rtlCol="0" anchor="ctr"/>
-          <a:lstStyle/>
-          <a:p>
-            <a:pPr algn="ctr"/>
-          </a:p>
-        </p:txBody>
-      </p:sp>
-      <p:sp>
-        <p:nvSpPr>
-          <p:cNvPr id="11" name="TextBox 10"/>
-          <p:cNvSpPr txBox="1"/>
-          <p:nvPr/>
-        </p:nvSpPr>
-        <p:spPr>
-          <a:xfrm>
-            <a:off x="2761487" y="2020824"/>
-            <a:ext cx="2176272" cy="402336"/>
-          </a:xfrm>
-          <a:prstGeom prst="rect">
-            <a:avLst/>
-          </a:prstGeom>
-          <a:noFill/>
-        </p:spPr>
-        <p:txBody>
-          <a:bodyPr wrap="square" lIns="0" rIns="0" tIns="0" bIns="0" anchor="ctr">
-            <a:spAutoFit/>
-          </a:bodyPr>
-          <a:lstStyle/>
-          <a:p>
-            <a:pPr algn="ctr">
-              <a:spcAft>
-                <a:spcPts val="0"/>
-              </a:spcAft>
-            </a:pPr>
-            <a:r>
-              <a:rPr sz="1500" b="1" i="0">
-                <a:solidFill>
-                  <a:srgbClr val="FFFFFF"/>
-                </a:solidFill>
-                <a:latin typeface="Yu Gothic"/>
-                <a:ea typeface="Yu Gothic"/>
-                <a:cs typeface="Yu Gothic"/>
-              </a:rPr>
-              <a:t>火</a:t>
-            </a:r>
-            <a:r>
-              <a:rPr sz="850" b="0" i="0">
-                <a:solidFill>
-                  <a:srgbClr val="E0D2F6"/>
-                </a:solidFill>
-                <a:latin typeface="Yu Gothic"/>
-                <a:ea typeface="Yu Gothic"/>
-                <a:cs typeface="Yu Gothic"/>
-              </a:rPr>
-              <a:t>  TUE</a:t>
-            </a:r>
-          </a:p>
-        </p:txBody>
-      </p:sp>
-      <p:sp>
-        <p:nvSpPr>
-          <p:cNvPr id="12" name="Rectangle 11"/>
-          <p:cNvSpPr/>
-          <p:nvPr/>
-        </p:nvSpPr>
-        <p:spPr>
-          <a:xfrm>
-            <a:off x="2761487" y="2450592"/>
-            <a:ext cx="2176272" cy="2542032"/>
-          </a:xfrm>
-          <a:prstGeom prst="rect">
-            <a:avLst/>
-          </a:prstGeom>
-          <a:solidFill>
-            <a:srgbClr val="FFFFFF"/>
-          </a:solidFill>
-          <a:ln w="9525">
-            <a:solidFill>
-              <a:srgbClr val="D9D9E0"/>
-            </a:solidFill>
-          </a:ln>
-          <a:effectLst/>
-        </p:spPr>
-        <p:style>
-          <a:lnRef idx="1">
-            <a:schemeClr val="accent1"/>
-          </a:lnRef>
-          <a:fillRef idx="3">
-            <a:schemeClr val="accent1"/>
-          </a:fillRef>
-          <a:effectRef idx="2">
-            <a:schemeClr val="accent1"/>
-          </a:effectRef>
-          <a:fontRef idx="minor">
-            <a:schemeClr val="lt1"/>
-          </a:fontRef>
-        </p:style>
-        <p:txBody>
-          <a:bodyPr rtlCol="0" anchor="ctr"/>
-          <a:lstStyle/>
-          <a:p>
-            <a:pPr algn="ctr"/>
-          </a:p>
-        </p:txBody>
-      </p:sp>
-      <p:sp>
-        <p:nvSpPr>
-          <p:cNvPr id="13" name="TextBox 12"/>
-          <p:cNvSpPr txBox="1"/>
-          <p:nvPr/>
-        </p:nvSpPr>
-        <p:spPr>
-          <a:xfrm>
-            <a:off x="2889503" y="2560320"/>
-            <a:ext cx="1938528" cy="2340864"/>
-          </a:xfrm>
-          <a:prstGeom prst="rect">
-            <a:avLst/>
-          </a:prstGeom>
-          <a:noFill/>
-        </p:spPr>
-        <p:txBody>
-          <a:bodyPr wrap="square" lIns="0" rIns="0" tIns="0" bIns="0">
-            <a:spAutoFit/>
-          </a:bodyPr>
-          <a:lstStyle/>
-          <a:p>
-            <a:pPr algn="l">
-              <a:spcAft>
-                <a:spcPts val="300"/>
-              </a:spcAft>
-            </a:pPr>
-            <a:r>
-              <a:rPr sz="950" b="1" i="0">
-                <a:solidFill>
-                  <a:srgbClr val="3A106E"/>
-                </a:solidFill>
-                <a:latin typeface="Yu Gothic"/>
-                <a:ea typeface="Yu Gothic"/>
-                <a:cs typeface="Yu Gothic"/>
-              </a:rPr>
-              <a:t>分科会デー</a:t>
-            </a:r>
-          </a:p>
-          <a:p>
-            <a:pPr algn="l">
-              <a:spcAft>
-                <a:spcPts val="300"/>
-              </a:spcAft>
-            </a:pPr>
-            <a:r>
-              <a:rPr sz="850" b="0" i="0">
-                <a:solidFill>
-                  <a:srgbClr val="262630"/>
-                </a:solidFill>
-                <a:latin typeface="Yu Gothic"/>
-                <a:ea typeface="Yu Gothic"/>
-                <a:cs typeface="Yu Gothic"/>
-              </a:rPr>
-              <a:t>・3分科会を並行/ずらし開催</a:t>
-            </a:r>
-          </a:p>
-          <a:p>
-            <a:pPr algn="l">
-              <a:spcAft>
-                <a:spcPts val="300"/>
-              </a:spcAft>
-            </a:pPr>
-            <a:r>
-              <a:rPr sz="850" b="0" i="0">
-                <a:solidFill>
-                  <a:srgbClr val="262630"/>
-                </a:solidFill>
-                <a:latin typeface="Yu Gothic"/>
-                <a:ea typeface="Yu Gothic"/>
-                <a:cs typeface="Yu Gothic"/>
-              </a:rPr>
-              <a:t>・データパック供給（坪井）</a:t>
-            </a:r>
-          </a:p>
-          <a:p>
-            <a:pPr algn="l">
-              <a:spcAft>
-                <a:spcPts val="300"/>
-              </a:spcAft>
-            </a:pPr>
-            <a:r>
-              <a:rPr sz="850" b="0" i="0">
-                <a:solidFill>
-                  <a:srgbClr val="262630"/>
-                </a:solidFill>
-                <a:latin typeface="Yu Gothic"/>
-                <a:ea typeface="Yu Gothic"/>
-                <a:cs typeface="Yu Gothic"/>
-              </a:rPr>
-              <a:t>・議事録・宿題起票（坪井）</a:t>
-            </a:r>
-          </a:p>
-        </p:txBody>
-      </p:sp>
-      <p:sp>
-        <p:nvSpPr>
-          <p:cNvPr id="14" name="Rectangle 13"/>
-          <p:cNvSpPr/>
-          <p:nvPr/>
-        </p:nvSpPr>
-        <p:spPr>
-          <a:xfrm>
-            <a:off x="5020055" y="1993392"/>
-            <a:ext cx="2176272" cy="457200"/>
-          </a:xfrm>
-          <a:prstGeom prst="rect">
-            <a:avLst/>
-          </a:prstGeom>
-          <a:solidFill>
-            <a:srgbClr val="7823DC"/>
-          </a:solidFill>
-          <a:ln>
-            <a:noFill/>
-          </a:ln>
-          <a:effectLst/>
-        </p:spPr>
-        <p:style>
-          <a:lnRef idx="1">
-            <a:schemeClr val="accent1"/>
-          </a:lnRef>
-          <a:fillRef idx="3">
-            <a:schemeClr val="accent1"/>
-          </a:fillRef>
-          <a:effectRef idx="2">
-            <a:schemeClr val="accent1"/>
-          </a:effectRef>
-          <a:fontRef idx="minor">
-            <a:schemeClr val="lt1"/>
-          </a:fontRef>
-        </p:style>
-        <p:txBody>
-          <a:bodyPr rtlCol="0" anchor="ctr"/>
-          <a:lstStyle/>
-          <a:p>
-            <a:pPr algn="ctr"/>
-          </a:p>
-        </p:txBody>
-      </p:sp>
-      <p:sp>
-        <p:nvSpPr>
-          <p:cNvPr id="15" name="TextBox 14"/>
-          <p:cNvSpPr txBox="1"/>
-          <p:nvPr/>
-        </p:nvSpPr>
-        <p:spPr>
-          <a:xfrm>
-            <a:off x="5020055" y="2020824"/>
-            <a:ext cx="2176272" cy="402336"/>
-          </a:xfrm>
-          <a:prstGeom prst="rect">
-            <a:avLst/>
-          </a:prstGeom>
-          <a:noFill/>
-        </p:spPr>
-        <p:txBody>
-          <a:bodyPr wrap="square" lIns="0" rIns="0" tIns="0" bIns="0" anchor="ctr">
-            <a:spAutoFit/>
-          </a:bodyPr>
-          <a:lstStyle/>
-          <a:p>
-            <a:pPr algn="ctr">
-              <a:spcAft>
-                <a:spcPts val="0"/>
-              </a:spcAft>
-            </a:pPr>
-            <a:r>
-              <a:rPr sz="1500" b="1" i="0">
-                <a:solidFill>
-                  <a:srgbClr val="FFFFFF"/>
-                </a:solidFill>
-                <a:latin typeface="Yu Gothic"/>
-                <a:ea typeface="Yu Gothic"/>
-                <a:cs typeface="Yu Gothic"/>
-              </a:rPr>
-              <a:t>水</a:t>
-            </a:r>
-            <a:r>
-              <a:rPr sz="850" b="0" i="0">
-                <a:solidFill>
-                  <a:srgbClr val="E0D2F6"/>
-                </a:solidFill>
-                <a:latin typeface="Yu Gothic"/>
-                <a:ea typeface="Yu Gothic"/>
-                <a:cs typeface="Yu Gothic"/>
-              </a:rPr>
-              <a:t>  WED</a:t>
-            </a:r>
-          </a:p>
-        </p:txBody>
-      </p:sp>
-      <p:sp>
-        <p:nvSpPr>
-          <p:cNvPr id="16" name="Rectangle 15"/>
-          <p:cNvSpPr/>
-          <p:nvPr/>
-        </p:nvSpPr>
-        <p:spPr>
-          <a:xfrm>
-            <a:off x="5020055" y="2450592"/>
-            <a:ext cx="2176272" cy="2542032"/>
-          </a:xfrm>
-          <a:prstGeom prst="rect">
-            <a:avLst/>
-          </a:prstGeom>
-          <a:solidFill>
-            <a:srgbClr val="FFFFFF"/>
-          </a:solidFill>
-          <a:ln w="9525">
-            <a:solidFill>
-              <a:srgbClr val="D9D9E0"/>
-            </a:solidFill>
-          </a:ln>
-          <a:effectLst/>
-        </p:spPr>
-        <p:style>
-          <a:lnRef idx="1">
-            <a:schemeClr val="accent1"/>
-          </a:lnRef>
-          <a:fillRef idx="3">
-            <a:schemeClr val="accent1"/>
-          </a:fillRef>
-          <a:effectRef idx="2">
-            <a:schemeClr val="accent1"/>
-          </a:effectRef>
-          <a:fontRef idx="minor">
-            <a:schemeClr val="lt1"/>
-          </a:fontRef>
-        </p:style>
-        <p:txBody>
-          <a:bodyPr rtlCol="0" anchor="ctr"/>
-          <a:lstStyle/>
-          <a:p>
-            <a:pPr algn="ctr"/>
-          </a:p>
-        </p:txBody>
-      </p:sp>
-      <p:sp>
-        <p:nvSpPr>
-          <p:cNvPr id="17" name="TextBox 16"/>
-          <p:cNvSpPr txBox="1"/>
-          <p:nvPr/>
-        </p:nvSpPr>
-        <p:spPr>
-          <a:xfrm>
-            <a:off x="5148071" y="2560320"/>
-            <a:ext cx="1938528" cy="2340864"/>
-          </a:xfrm>
-          <a:prstGeom prst="rect">
-            <a:avLst/>
-          </a:prstGeom>
-          <a:noFill/>
-        </p:spPr>
-        <p:txBody>
-          <a:bodyPr wrap="square" lIns="0" rIns="0" tIns="0" bIns="0">
-            <a:spAutoFit/>
-          </a:bodyPr>
-          <a:lstStyle/>
-          <a:p>
-            <a:pPr algn="l">
-              <a:spcAft>
-                <a:spcPts val="300"/>
-              </a:spcAft>
-            </a:pPr>
-            <a:r>
-              <a:rPr sz="950" b="1" i="0">
-                <a:solidFill>
-                  <a:srgbClr val="3A106E"/>
-                </a:solidFill>
-                <a:latin typeface="Yu Gothic"/>
-                <a:ea typeface="Yu Gothic"/>
-                <a:cs typeface="Yu Gothic"/>
-              </a:rPr>
-              <a:t>データ処理集中日</a:t>
-            </a:r>
-          </a:p>
-          <a:p>
-            <a:pPr algn="l">
-              <a:spcAft>
-                <a:spcPts val="300"/>
-              </a:spcAft>
-            </a:pPr>
-            <a:r>
-              <a:rPr sz="850" b="0" i="0">
-                <a:solidFill>
-                  <a:srgbClr val="262630"/>
-                </a:solidFill>
-                <a:latin typeface="Yu Gothic"/>
-                <a:ea typeface="Yu Gothic"/>
-                <a:cs typeface="Yu Gothic"/>
-              </a:rPr>
-              <a:t>・財務流し込み・名寄せ</a:t>
-            </a:r>
-          </a:p>
-          <a:p>
-            <a:pPr algn="l">
-              <a:spcAft>
-                <a:spcPts val="300"/>
-              </a:spcAft>
-            </a:pPr>
-            <a:r>
-              <a:rPr sz="850" b="0" i="0">
-                <a:solidFill>
-                  <a:srgbClr val="262630"/>
-                </a:solidFill>
-                <a:latin typeface="Yu Gothic"/>
-                <a:ea typeface="Yu Gothic"/>
-                <a:cs typeface="Yu Gothic"/>
-              </a:rPr>
-              <a:t>・スコア集計（坪井）</a:t>
-            </a:r>
-          </a:p>
-          <a:p>
-            <a:pPr algn="l">
-              <a:spcAft>
-                <a:spcPts val="300"/>
-              </a:spcAft>
-            </a:pPr>
-            <a:r>
-              <a:rPr sz="950" b="1" i="0">
-                <a:solidFill>
-                  <a:srgbClr val="3A106E"/>
-                </a:solidFill>
-                <a:latin typeface="Yu Gothic"/>
-                <a:ea typeface="Yu Gothic"/>
-                <a:cs typeface="Yu Gothic"/>
-              </a:rPr>
-              <a:t>宿題の中間督促</a:t>
-            </a:r>
-          </a:p>
-          <a:p>
-            <a:pPr algn="l">
-              <a:spcAft>
-                <a:spcPts val="300"/>
-              </a:spcAft>
-            </a:pPr>
-            <a:r>
-              <a:rPr sz="850" b="0" i="0">
-                <a:solidFill>
-                  <a:srgbClr val="262630"/>
-                </a:solidFill>
-                <a:latin typeface="Yu Gothic"/>
-                <a:ea typeface="Yu Gothic"/>
-                <a:cs typeface="Yu Gothic"/>
-              </a:rPr>
-              <a:t>・停滞の芽を朝10分で点検</a:t>
-            </a:r>
-          </a:p>
-        </p:txBody>
-      </p:sp>
-      <p:sp>
-        <p:nvSpPr>
-          <p:cNvPr id="18" name="Rectangle 17"/>
-          <p:cNvSpPr/>
-          <p:nvPr/>
-        </p:nvSpPr>
-        <p:spPr>
-          <a:xfrm>
-            <a:off x="7278623" y="1993392"/>
-            <a:ext cx="2176272" cy="457200"/>
-          </a:xfrm>
-          <a:prstGeom prst="rect">
-            <a:avLst/>
-          </a:prstGeom>
-          <a:solidFill>
-            <a:srgbClr val="7823DC"/>
-          </a:solidFill>
-          <a:ln>
-            <a:noFill/>
-          </a:ln>
-          <a:effectLst/>
-        </p:spPr>
-        <p:style>
-          <a:lnRef idx="1">
-            <a:schemeClr val="accent1"/>
-          </a:lnRef>
-          <a:fillRef idx="3">
-            <a:schemeClr val="accent1"/>
-          </a:fillRef>
-          <a:effectRef idx="2">
-            <a:schemeClr val="accent1"/>
-          </a:effectRef>
-          <a:fontRef idx="minor">
-            <a:schemeClr val="lt1"/>
-          </a:fontRef>
-        </p:style>
-        <p:txBody>
-          <a:bodyPr rtlCol="0" anchor="ctr"/>
-          <a:lstStyle/>
-          <a:p>
-            <a:pPr algn="ctr"/>
-          </a:p>
-        </p:txBody>
-      </p:sp>
-      <p:sp>
-        <p:nvSpPr>
-          <p:cNvPr id="19" name="TextBox 18"/>
-          <p:cNvSpPr txBox="1"/>
-          <p:nvPr/>
-        </p:nvSpPr>
-        <p:spPr>
-          <a:xfrm>
-            <a:off x="7278623" y="2020824"/>
-            <a:ext cx="2176272" cy="402336"/>
-          </a:xfrm>
-          <a:prstGeom prst="rect">
-            <a:avLst/>
-          </a:prstGeom>
-          <a:noFill/>
-        </p:spPr>
-        <p:txBody>
-          <a:bodyPr wrap="square" lIns="0" rIns="0" tIns="0" bIns="0" anchor="ctr">
-            <a:spAutoFit/>
-          </a:bodyPr>
-          <a:lstStyle/>
-          <a:p>
-            <a:pPr algn="ctr">
-              <a:spcAft>
-                <a:spcPts val="0"/>
-              </a:spcAft>
-            </a:pPr>
-            <a:r>
-              <a:rPr sz="1500" b="1" i="0">
-                <a:solidFill>
-                  <a:srgbClr val="FFFFFF"/>
-                </a:solidFill>
-                <a:latin typeface="Yu Gothic"/>
-                <a:ea typeface="Yu Gothic"/>
-                <a:cs typeface="Yu Gothic"/>
-              </a:rPr>
-              <a:t>木</a:t>
-            </a:r>
-            <a:r>
-              <a:rPr sz="850" b="0" i="0">
-                <a:solidFill>
-                  <a:srgbClr val="E0D2F6"/>
-                </a:solidFill>
-                <a:latin typeface="Yu Gothic"/>
-                <a:ea typeface="Yu Gothic"/>
-                <a:cs typeface="Yu Gothic"/>
-              </a:rPr>
-              <a:t>  THU</a:t>
-            </a:r>
-          </a:p>
-        </p:txBody>
-      </p:sp>
-      <p:sp>
-        <p:nvSpPr>
-          <p:cNvPr id="20" name="Rectangle 19"/>
-          <p:cNvSpPr/>
-          <p:nvPr/>
-        </p:nvSpPr>
-        <p:spPr>
-          <a:xfrm>
-            <a:off x="7278623" y="2450592"/>
-            <a:ext cx="2176272" cy="2542032"/>
-          </a:xfrm>
-          <a:prstGeom prst="rect">
-            <a:avLst/>
-          </a:prstGeom>
-          <a:solidFill>
-            <a:srgbClr val="FFFFFF"/>
-          </a:solidFill>
-          <a:ln w="9525">
-            <a:solidFill>
-              <a:srgbClr val="D9D9E0"/>
-            </a:solidFill>
-          </a:ln>
-          <a:effectLst/>
-        </p:spPr>
-        <p:style>
-          <a:lnRef idx="1">
-            <a:schemeClr val="accent1"/>
-          </a:lnRef>
-          <a:fillRef idx="3">
-            <a:schemeClr val="accent1"/>
-          </a:fillRef>
-          <a:effectRef idx="2">
-            <a:schemeClr val="accent1"/>
-          </a:effectRef>
-          <a:fontRef idx="minor">
-            <a:schemeClr val="lt1"/>
-          </a:fontRef>
-        </p:style>
-        <p:txBody>
-          <a:bodyPr rtlCol="0" anchor="ctr"/>
-          <a:lstStyle/>
-          <a:p>
-            <a:pPr algn="ctr"/>
-          </a:p>
-        </p:txBody>
-      </p:sp>
-      <p:sp>
-        <p:nvSpPr>
-          <p:cNvPr id="21" name="TextBox 20"/>
-          <p:cNvSpPr txBox="1"/>
-          <p:nvPr/>
-        </p:nvSpPr>
-        <p:spPr>
-          <a:xfrm>
-            <a:off x="7406639" y="2560320"/>
-            <a:ext cx="1938528" cy="2340864"/>
-          </a:xfrm>
-          <a:prstGeom prst="rect">
-            <a:avLst/>
-          </a:prstGeom>
-          <a:noFill/>
-        </p:spPr>
-        <p:txBody>
-          <a:bodyPr wrap="square" lIns="0" rIns="0" tIns="0" bIns="0">
-            <a:spAutoFit/>
-          </a:bodyPr>
-          <a:lstStyle/>
-          <a:p>
-            <a:pPr algn="l">
-              <a:spcAft>
-                <a:spcPts val="300"/>
-              </a:spcAft>
-            </a:pPr>
-            <a:r>
-              <a:rPr sz="950" b="1" i="0">
-                <a:solidFill>
-                  <a:srgbClr val="3A106E"/>
-                </a:solidFill>
-                <a:latin typeface="Yu Gothic"/>
-                <a:ea typeface="Yu Gothic"/>
-                <a:cs typeface="Yu Gothic"/>
-              </a:rPr>
-              <a:t>戦略会議（隔週）</a:t>
-            </a:r>
-          </a:p>
-          <a:p>
-            <a:pPr algn="l">
-              <a:spcAft>
-                <a:spcPts val="300"/>
-              </a:spcAft>
-            </a:pPr>
-            <a:r>
-              <a:rPr sz="850" b="0" i="0">
-                <a:solidFill>
-                  <a:srgbClr val="262630"/>
-                </a:solidFill>
-                <a:latin typeface="Yu Gothic"/>
-                <a:ea typeface="Yu Gothic"/>
-                <a:cs typeface="Yu Gothic"/>
-              </a:rPr>
-              <a:t>・分科会論点を意思決定</a:t>
-            </a:r>
-          </a:p>
-          <a:p>
-            <a:pPr algn="l">
-              <a:spcAft>
-                <a:spcPts val="300"/>
-              </a:spcAft>
-            </a:pPr>
-            <a:r>
-              <a:rPr sz="950" b="1" i="0">
-                <a:solidFill>
-                  <a:srgbClr val="3A106E"/>
-                </a:solidFill>
-                <a:latin typeface="Yu Gothic"/>
-                <a:ea typeface="Yu Gothic"/>
-                <a:cs typeface="Yu Gothic"/>
-              </a:rPr>
-              <a:t>前日=水夕に事前確認</a:t>
-            </a:r>
-          </a:p>
-          <a:p>
-            <a:pPr algn="l">
-              <a:spcAft>
-                <a:spcPts val="300"/>
-              </a:spcAft>
-            </a:pPr>
-            <a:r>
-              <a:rPr sz="850" b="0" i="0">
-                <a:solidFill>
-                  <a:srgbClr val="262630"/>
-                </a:solidFill>
-                <a:latin typeface="Yu Gothic"/>
-                <a:ea typeface="Yu Gothic"/>
-                <a:cs typeface="Yu Gothic"/>
-              </a:rPr>
-              <a:t>・新谷のアジェンダ確認30分</a:t>
-            </a:r>
-          </a:p>
-          <a:p>
-            <a:pPr algn="l">
-              <a:spcAft>
-                <a:spcPts val="300"/>
-              </a:spcAft>
-            </a:pPr>
-            <a:r>
-              <a:rPr sz="850" b="0" i="0">
-                <a:solidFill>
-                  <a:srgbClr val="262630"/>
-                </a:solidFill>
-                <a:latin typeface="Yu Gothic"/>
-                <a:ea typeface="Yu Gothic"/>
-                <a:cs typeface="Yu Gothic"/>
-              </a:rPr>
-              <a:t>・点検会議キーチャート仕上げ</a:t>
-            </a:r>
-          </a:p>
-        </p:txBody>
-      </p:sp>
-      <p:sp>
-        <p:nvSpPr>
-          <p:cNvPr id="22" name="Rectangle 21"/>
-          <p:cNvSpPr/>
-          <p:nvPr/>
-        </p:nvSpPr>
-        <p:spPr>
-          <a:xfrm>
-            <a:off x="9537192" y="1993392"/>
-            <a:ext cx="2176272" cy="457200"/>
-          </a:xfrm>
-          <a:prstGeom prst="rect">
-            <a:avLst/>
-          </a:prstGeom>
-          <a:solidFill>
-            <a:srgbClr val="7823DC"/>
-          </a:solidFill>
-          <a:ln>
-            <a:noFill/>
-          </a:ln>
-          <a:effectLst/>
-        </p:spPr>
-        <p:style>
-          <a:lnRef idx="1">
-            <a:schemeClr val="accent1"/>
-          </a:lnRef>
-          <a:fillRef idx="3">
-            <a:schemeClr val="accent1"/>
-          </a:fillRef>
-          <a:effectRef idx="2">
-            <a:schemeClr val="accent1"/>
-          </a:effectRef>
-          <a:fontRef idx="minor">
-            <a:schemeClr val="lt1"/>
-          </a:fontRef>
-        </p:style>
-        <p:txBody>
-          <a:bodyPr rtlCol="0" anchor="ctr"/>
-          <a:lstStyle/>
-          <a:p>
-            <a:pPr algn="ctr"/>
-          </a:p>
-        </p:txBody>
-      </p:sp>
-      <p:sp>
-        <p:nvSpPr>
-          <p:cNvPr id="23" name="TextBox 22"/>
-          <p:cNvSpPr txBox="1"/>
-          <p:nvPr/>
-        </p:nvSpPr>
-        <p:spPr>
-          <a:xfrm>
-            <a:off x="9537192" y="2020824"/>
-            <a:ext cx="2176272" cy="402336"/>
-          </a:xfrm>
-          <a:prstGeom prst="rect">
-            <a:avLst/>
-          </a:prstGeom>
-          <a:noFill/>
-        </p:spPr>
-        <p:txBody>
-          <a:bodyPr wrap="square" lIns="0" rIns="0" tIns="0" bIns="0" anchor="ctr">
-            <a:spAutoFit/>
-          </a:bodyPr>
-          <a:lstStyle/>
-          <a:p>
-            <a:pPr algn="ctr">
-              <a:spcAft>
-                <a:spcPts val="0"/>
-              </a:spcAft>
-            </a:pPr>
-            <a:r>
-              <a:rPr sz="1500" b="1" i="0">
-                <a:solidFill>
-                  <a:srgbClr val="FFFFFF"/>
-                </a:solidFill>
-                <a:latin typeface="Yu Gothic"/>
-                <a:ea typeface="Yu Gothic"/>
-                <a:cs typeface="Yu Gothic"/>
-              </a:rPr>
-              <a:t>金</a:t>
-            </a:r>
-            <a:r>
-              <a:rPr sz="850" b="0" i="0">
-                <a:solidFill>
-                  <a:srgbClr val="E0D2F6"/>
-                </a:solidFill>
-                <a:latin typeface="Yu Gothic"/>
-                <a:ea typeface="Yu Gothic"/>
-                <a:cs typeface="Yu Gothic"/>
-              </a:rPr>
-              <a:t>  FRI</a:t>
-            </a:r>
-          </a:p>
-        </p:txBody>
-      </p:sp>
-      <p:sp>
-        <p:nvSpPr>
-          <p:cNvPr id="24" name="Rectangle 23"/>
-          <p:cNvSpPr/>
-          <p:nvPr/>
-        </p:nvSpPr>
-        <p:spPr>
-          <a:xfrm>
-            <a:off x="9537192" y="2450592"/>
-            <a:ext cx="2176272" cy="2542032"/>
-          </a:xfrm>
-          <a:prstGeom prst="rect">
-            <a:avLst/>
-          </a:prstGeom>
-          <a:solidFill>
-            <a:srgbClr val="FFFFFF"/>
-          </a:solidFill>
-          <a:ln w="9525">
-            <a:solidFill>
-              <a:srgbClr val="D9D9E0"/>
-            </a:solidFill>
-          </a:ln>
-          <a:effectLst/>
-        </p:spPr>
-        <p:style>
-          <a:lnRef idx="1">
-            <a:schemeClr val="accent1"/>
-          </a:lnRef>
-          <a:fillRef idx="3">
-            <a:schemeClr val="accent1"/>
-          </a:fillRef>
-          <a:effectRef idx="2">
-            <a:schemeClr val="accent1"/>
-          </a:effectRef>
-          <a:fontRef idx="minor">
-            <a:schemeClr val="lt1"/>
-          </a:fontRef>
-        </p:style>
-        <p:txBody>
-          <a:bodyPr rtlCol="0" anchor="ctr"/>
-          <a:lstStyle/>
-          <a:p>
-            <a:pPr algn="ctr"/>
-          </a:p>
-        </p:txBody>
-      </p:sp>
-      <p:sp>
-        <p:nvSpPr>
-          <p:cNvPr id="25" name="TextBox 24"/>
-          <p:cNvSpPr txBox="1"/>
-          <p:nvPr/>
-        </p:nvSpPr>
-        <p:spPr>
-          <a:xfrm>
-            <a:off x="9665208" y="2560320"/>
-            <a:ext cx="1938528" cy="2340864"/>
-          </a:xfrm>
-          <a:prstGeom prst="rect">
-            <a:avLst/>
-          </a:prstGeom>
-          <a:noFill/>
-        </p:spPr>
-        <p:txBody>
-          <a:bodyPr wrap="square" lIns="0" rIns="0" tIns="0" bIns="0">
-            <a:spAutoFit/>
-          </a:bodyPr>
-          <a:lstStyle/>
-          <a:p>
-            <a:pPr algn="l">
-              <a:spcAft>
-                <a:spcPts val="300"/>
-              </a:spcAft>
-            </a:pPr>
-            <a:r>
-              <a:rPr sz="950" b="1" i="0">
-                <a:solidFill>
-                  <a:srgbClr val="3A106E"/>
-                </a:solidFill>
-                <a:latin typeface="Yu Gothic"/>
-                <a:ea typeface="Yu Gothic"/>
-                <a:cs typeface="Yu Gothic"/>
-              </a:rPr>
-              <a:t>17:00 週次レビュー30分</a:t>
-            </a:r>
-          </a:p>
-          <a:p>
-            <a:pPr algn="l">
-              <a:spcAft>
-                <a:spcPts val="300"/>
-              </a:spcAft>
-            </a:pPr>
-            <a:r>
-              <a:rPr sz="850" b="0" i="0">
-                <a:solidFill>
-                  <a:srgbClr val="262630"/>
-                </a:solidFill>
-                <a:latin typeface="Yu Gothic"/>
-                <a:ea typeface="Yu Gothic"/>
-                <a:cs typeface="Yu Gothic"/>
-              </a:rPr>
-              <a:t>（新谷・小沢・坪井）</a:t>
-            </a:r>
-          </a:p>
-          <a:p>
-            <a:pPr algn="l">
-              <a:spcAft>
-                <a:spcPts val="300"/>
-              </a:spcAft>
-            </a:pPr>
-            <a:r>
-              <a:rPr sz="850" b="0" i="0">
-                <a:solidFill>
-                  <a:srgbClr val="262630"/>
-                </a:solidFill>
-                <a:latin typeface="Yu Gothic"/>
-                <a:ea typeface="Yu Gothic"/>
-                <a:cs typeface="Yu Gothic"/>
-              </a:rPr>
-              <a:t>・キュー残／データ鮮度</a:t>
-            </a:r>
-          </a:p>
-          <a:p>
-            <a:pPr algn="l">
-              <a:spcAft>
-                <a:spcPts val="300"/>
-              </a:spcAft>
-            </a:pPr>
-            <a:r>
-              <a:rPr sz="850" b="0" i="0">
-                <a:solidFill>
-                  <a:srgbClr val="262630"/>
-                </a:solidFill>
-                <a:latin typeface="Yu Gothic"/>
-                <a:ea typeface="Yu Gothic"/>
-                <a:cs typeface="Yu Gothic"/>
-              </a:rPr>
-              <a:t>・宿題消化率／来週の論点</a:t>
-            </a:r>
-          </a:p>
-          <a:p>
-            <a:pPr algn="l">
-              <a:spcAft>
-                <a:spcPts val="300"/>
-              </a:spcAft>
-            </a:pPr>
-            <a:r>
-              <a:rPr sz="850" b="0" i="0">
-                <a:solidFill>
-                  <a:srgbClr val="262630"/>
-                </a:solidFill>
-                <a:latin typeface="Yu Gothic"/>
-                <a:ea typeface="Yu Gothic"/>
-                <a:cs typeface="Yu Gothic"/>
-              </a:rPr>
-              <a:t>・エスカレーション確認</a:t>
-            </a:r>
-          </a:p>
-        </p:txBody>
-      </p:sp>
-      <p:sp>
-        <p:nvSpPr>
-          <p:cNvPr id="26" name="Rectangle 25"/>
-          <p:cNvSpPr/>
-          <p:nvPr/>
-        </p:nvSpPr>
-        <p:spPr>
-          <a:xfrm>
-            <a:off x="502920" y="5230368"/>
-            <a:ext cx="5504688" cy="1078992"/>
-          </a:xfrm>
-          <a:prstGeom prst="rect">
-            <a:avLst/>
-          </a:prstGeom>
-          <a:solidFill>
-            <a:srgbClr val="F3EFFB"/>
-          </a:solidFill>
-          <a:ln>
-            <a:noFill/>
-          </a:ln>
-          <a:effectLst/>
-        </p:spPr>
-        <p:style>
-          <a:lnRef idx="1">
-            <a:schemeClr val="accent1"/>
-          </a:lnRef>
-          <a:fillRef idx="3">
-            <a:schemeClr val="accent1"/>
-          </a:fillRef>
-          <a:effectRef idx="2">
-            <a:schemeClr val="accent1"/>
-          </a:effectRef>
-          <a:fontRef idx="minor">
-            <a:schemeClr val="lt1"/>
-          </a:fontRef>
-        </p:style>
-        <p:txBody>
-          <a:bodyPr rtlCol="0" anchor="ctr"/>
-          <a:lstStyle/>
-          <a:p>
-            <a:pPr algn="ctr"/>
-          </a:p>
-        </p:txBody>
-      </p:sp>
-      <p:sp>
-        <p:nvSpPr>
-          <p:cNvPr id="27" name="Rectangle 26"/>
-          <p:cNvSpPr/>
-          <p:nvPr/>
-        </p:nvSpPr>
-        <p:spPr>
-          <a:xfrm>
-            <a:off x="502920" y="5230368"/>
-            <a:ext cx="38100" cy="1078992"/>
-          </a:xfrm>
-          <a:prstGeom prst="rect">
-            <a:avLst/>
-          </a:prstGeom>
-          <a:solidFill>
-            <a:srgbClr val="7823DC"/>
-          </a:solidFill>
-          <a:ln>
-            <a:noFill/>
-          </a:ln>
-          <a:effectLst/>
-        </p:spPr>
-        <p:style>
-          <a:lnRef idx="1">
-            <a:schemeClr val="accent1"/>
-          </a:lnRef>
-          <a:fillRef idx="3">
-            <a:schemeClr val="accent1"/>
-          </a:fillRef>
-          <a:effectRef idx="2">
-            <a:schemeClr val="accent1"/>
-          </a:effectRef>
-          <a:fontRef idx="minor">
-            <a:schemeClr val="lt1"/>
-          </a:fontRef>
-        </p:style>
-        <p:txBody>
-          <a:bodyPr rtlCol="0" anchor="ctr"/>
-          <a:lstStyle/>
-          <a:p>
-            <a:pPr algn="ctr"/>
-          </a:p>
-        </p:txBody>
-      </p:sp>
-      <p:sp>
-        <p:nvSpPr>
-          <p:cNvPr id="28" name="TextBox 27"/>
-          <p:cNvSpPr txBox="1"/>
-          <p:nvPr/>
-        </p:nvSpPr>
-        <p:spPr>
-          <a:xfrm>
-            <a:off x="685800" y="5340096"/>
-            <a:ext cx="5175504" cy="896112"/>
-          </a:xfrm>
-          <a:prstGeom prst="rect">
-            <a:avLst/>
-          </a:prstGeom>
-          <a:noFill/>
-        </p:spPr>
-        <p:txBody>
-          <a:bodyPr wrap="square" lIns="0" rIns="0" tIns="0" bIns="0">
-            <a:spAutoFit/>
-          </a:bodyPr>
-          <a:lstStyle/>
-          <a:p>
-            <a:pPr algn="l">
-              <a:spcAft>
-                <a:spcPts val="300"/>
-              </a:spcAft>
-            </a:pPr>
-            <a:r>
-              <a:rPr sz="1100" b="1" i="0">
-                <a:solidFill>
-                  <a:srgbClr val="3A106E"/>
-                </a:solidFill>
-                <a:latin typeface="Yu Gothic"/>
-                <a:ea typeface="Yu Gothic"/>
-                <a:cs typeface="Yu Gothic"/>
-              </a:rPr>
-              <a:t>エスカレーション</a:t>
-            </a:r>
-          </a:p>
-          <a:p>
-            <a:pPr algn="l">
-              <a:spcAft>
-                <a:spcPts val="200"/>
-              </a:spcAft>
-            </a:pPr>
-            <a:r>
-              <a:rPr sz="950" b="0" i="0">
-                <a:solidFill>
-                  <a:srgbClr val="262630"/>
-                </a:solidFill>
-                <a:latin typeface="Yu Gothic"/>
-                <a:ea typeface="Yu Gothic"/>
-                <a:cs typeface="Yu Gothic"/>
-              </a:rPr>
-              <a:t>24時間で解けないものは抱えずに上へ。滞留こそ失点。</a:t>
-            </a:r>
-          </a:p>
-          <a:p>
-            <a:pPr algn="l">
-              <a:spcAft>
-                <a:spcPts val="0"/>
-              </a:spcAft>
-            </a:pPr>
-            <a:r>
-              <a:rPr sz="950" b="1" i="0">
-                <a:solidFill>
-                  <a:srgbClr val="7823DC"/>
-                </a:solidFill>
-                <a:latin typeface="Yu Gothic"/>
-                <a:ea typeface="Yu Gothic"/>
-                <a:cs typeface="Yu Gothic"/>
-              </a:rPr>
-              <a:t>停滞3日で督促 → 5日で新谷へ自動エスカレーション。</a:t>
-            </a:r>
-          </a:p>
-        </p:txBody>
-      </p:sp>
-      <p:sp>
-        <p:nvSpPr>
-          <p:cNvPr id="29" name="Rectangle 28"/>
-          <p:cNvSpPr/>
-          <p:nvPr/>
-        </p:nvSpPr>
-        <p:spPr>
-          <a:xfrm>
-            <a:off x="6181344" y="5230368"/>
-            <a:ext cx="5504688" cy="1078992"/>
-          </a:xfrm>
-          <a:prstGeom prst="rect">
-            <a:avLst/>
-          </a:prstGeom>
-          <a:solidFill>
-            <a:srgbClr val="F7F7F9"/>
-          </a:solidFill>
-          <a:ln w="9525">
-            <a:solidFill>
-              <a:srgbClr val="D9D9E0"/>
-            </a:solidFill>
-          </a:ln>
-          <a:effectLst/>
-        </p:spPr>
-        <p:style>
-          <a:lnRef idx="1">
-            <a:schemeClr val="accent1"/>
-          </a:lnRef>
-          <a:fillRef idx="3">
-            <a:schemeClr val="accent1"/>
-          </a:fillRef>
-          <a:effectRef idx="2">
-            <a:schemeClr val="accent1"/>
-          </a:effectRef>
-          <a:fontRef idx="minor">
-            <a:schemeClr val="lt1"/>
-          </a:fontRef>
-        </p:style>
-        <p:txBody>
-          <a:bodyPr rtlCol="0" anchor="ctr"/>
-          <a:lstStyle/>
-          <a:p>
-            <a:pPr algn="ctr"/>
-          </a:p>
-        </p:txBody>
-      </p:sp>
-      <p:sp>
-        <p:nvSpPr>
-          <p:cNvPr id="30" name="Rectangle 29"/>
-          <p:cNvSpPr/>
-          <p:nvPr/>
-        </p:nvSpPr>
-        <p:spPr>
-          <a:xfrm>
-            <a:off x="6181344" y="5230368"/>
-            <a:ext cx="38100" cy="1078992"/>
-          </a:xfrm>
-          <a:prstGeom prst="rect">
-            <a:avLst/>
-          </a:prstGeom>
-          <a:solidFill>
-            <a:srgbClr val="3A106E"/>
-          </a:solidFill>
-          <a:ln>
-            <a:noFill/>
-          </a:ln>
-          <a:effectLst/>
-        </p:spPr>
-        <p:style>
-          <a:lnRef idx="1">
-            <a:schemeClr val="accent1"/>
-          </a:lnRef>
-          <a:fillRef idx="3">
-            <a:schemeClr val="accent1"/>
-          </a:fillRef>
-          <a:effectRef idx="2">
-            <a:schemeClr val="accent1"/>
-          </a:effectRef>
-          <a:fontRef idx="minor">
-            <a:schemeClr val="lt1"/>
-          </a:fontRef>
-        </p:style>
-        <p:txBody>
-          <a:bodyPr rtlCol="0" anchor="ctr"/>
-          <a:lstStyle/>
-          <a:p>
-            <a:pPr algn="ctr"/>
-          </a:p>
-        </p:txBody>
-      </p:sp>
-      <p:sp>
-        <p:nvSpPr>
-          <p:cNvPr id="31" name="TextBox 30"/>
-          <p:cNvSpPr txBox="1"/>
-          <p:nvPr/>
-        </p:nvSpPr>
-        <p:spPr>
-          <a:xfrm>
-            <a:off x="6364224" y="5340096"/>
-            <a:ext cx="5175504" cy="896112"/>
-          </a:xfrm>
-          <a:prstGeom prst="rect">
-            <a:avLst/>
-          </a:prstGeom>
-          <a:noFill/>
-        </p:spPr>
-        <p:txBody>
-          <a:bodyPr wrap="square" lIns="0" rIns="0" tIns="0" bIns="0">
-            <a:spAutoFit/>
-          </a:bodyPr>
-          <a:lstStyle/>
-          <a:p>
-            <a:pPr algn="l">
-              <a:spcAft>
-                <a:spcPts val="300"/>
-              </a:spcAft>
-            </a:pPr>
-            <a:r>
-              <a:rPr sz="1100" b="1" i="0">
-                <a:solidFill>
-                  <a:srgbClr val="3A106E"/>
-                </a:solidFill>
-                <a:latin typeface="Yu Gothic"/>
-                <a:ea typeface="Yu Gothic"/>
-                <a:cs typeface="Yu Gothic"/>
-              </a:rPr>
-              <a:t>STOの運転計器（金曜レビューで確認）</a:t>
-            </a:r>
-          </a:p>
-          <a:p>
-            <a:pPr algn="l">
-              <a:spcAft>
-                <a:spcPts val="200"/>
-              </a:spcAft>
-            </a:pPr>
-            <a:r>
-              <a:rPr sz="950" b="0" i="0">
-                <a:solidFill>
-                  <a:srgbClr val="262630"/>
-                </a:solidFill>
-                <a:latin typeface="Yu Gothic"/>
-                <a:ea typeface="Yu Gothic"/>
-                <a:cs typeface="Yu Gothic"/>
-              </a:rPr>
-              <a:t>キュー残件数／宿題消化率／停滞5日超ゼロ</a:t>
-            </a:r>
-          </a:p>
-          <a:p>
-            <a:pPr algn="l">
-              <a:spcAft>
-                <a:spcPts val="0"/>
-              </a:spcAft>
-            </a:pPr>
-            <a:r>
-              <a:rPr sz="950" b="0" i="0">
-                <a:solidFill>
-                  <a:srgbClr val="262630"/>
-                </a:solidFill>
-                <a:latin typeface="Yu Gothic"/>
-                <a:ea typeface="Yu Gothic"/>
-                <a:cs typeface="Yu Gothic"/>
-              </a:rPr>
-              <a:t>／データ鮮度（週1更新）／会議の定時運転</a:t>
-            </a:r>
-          </a:p>
-        </p:txBody>
-      </p:sp>
-      <p:sp>
-        <p:nvSpPr>
-          <p:cNvPr id="32" name="Rectangle 31"/>
-          <p:cNvSpPr/>
-          <p:nvPr/>
-        </p:nvSpPr>
-        <p:spPr>
-          <a:xfrm>
-            <a:off x="502920" y="6510528"/>
-            <a:ext cx="11183112" cy="15240"/>
-          </a:xfrm>
-          <a:prstGeom prst="rect">
-            <a:avLst/>
-          </a:prstGeom>
-          <a:solidFill>
-            <a:srgbClr val="D9D9E0"/>
-          </a:solidFill>
-          <a:ln>
-            <a:noFill/>
-          </a:ln>
-          <a:effectLst/>
-        </p:spPr>
-        <p:style>
-          <a:lnRef idx="1">
-            <a:schemeClr val="accent1"/>
-          </a:lnRef>
-          <a:fillRef idx="3">
-            <a:schemeClr val="accent1"/>
-          </a:fillRef>
-          <a:effectRef idx="2">
-            <a:schemeClr val="accent1"/>
-          </a:effectRef>
-          <a:fontRef idx="minor">
-            <a:schemeClr val="lt1"/>
-          </a:fontRef>
-        </p:style>
-        <p:txBody>
-          <a:bodyPr rtlCol="0" anchor="ctr"/>
-          <a:lstStyle/>
-          <a:p>
-            <a:pPr algn="ctr"/>
-          </a:p>
-        </p:txBody>
-      </p:sp>
-      <p:sp>
-        <p:nvSpPr>
-          <p:cNvPr id="33" name="TextBox 32"/>
-          <p:cNvSpPr txBox="1"/>
-          <p:nvPr/>
-        </p:nvSpPr>
-        <p:spPr>
-          <a:xfrm>
-            <a:off x="502920" y="6565392"/>
-            <a:ext cx="8686800" cy="274320"/>
-          </a:xfrm>
-          <a:prstGeom prst="rect">
-            <a:avLst/>
-          </a:prstGeom>
-          <a:noFill/>
-        </p:spPr>
-        <p:txBody>
-          <a:bodyPr wrap="square" lIns="0" rIns="0" tIns="0" bIns="0">
-            <a:spAutoFit/>
-          </a:bodyPr>
-          <a:lstStyle/>
-          <a:p>
-            <a:pPr algn="l">
-              <a:spcAft>
-                <a:spcPts val="400"/>
-              </a:spcAft>
-            </a:pPr>
-            <a:r>
               <a:rPr sz="750" b="0" i="0">
                 <a:solidFill>
-                  <a:srgbClr val="8A8A99"/>
+                  <a:srgbClr val="8A8F9C"/>
                 </a:solidFill>
                 <a:latin typeface="Yu Gothic"/>
                 <a:ea typeface="Yu Gothic"/>
@@ -6657,7 +6697,7 @@
             <a:r>
               <a:rPr sz="900" b="0" i="0">
                 <a:solidFill>
-                  <a:srgbClr val="5F5F6E"/>
+                  <a:srgbClr val="6B7280"/>
                 </a:solidFill>
                 <a:latin typeface="Yu Gothic"/>
                 <a:ea typeface="Yu Gothic"/>
